--- a/samples/nvda-5y-ai-events/artifacts/nvda_5y_decision_framework_v1.pptx
+++ b/samples/nvda-5y-ai-events/artifacts/nvda_5y_decision_framework_v1.pptx
@@ -3374,7 +3374,7 @@
           </a:bodyPr>
           <a:lstStyle/>
           <a:p>
-            <a:pPr algn="l">
+            <a:pPr>
               <a:lnSpc>
                 <a:spcPct val="110000"/>
               </a:lnSpc>
@@ -3390,11 +3390,32 @@
                 <a:latin typeface="Helvetica Neue"/>
                 <a:ea typeface="PingFang SC"/>
               </a:rPr>
-              <a:t>ev-s-20260705-0376-1［market_data］https://query1.finance.yahoo.com/v8/finance/chart/NVDA?period1=1625443200&amp;period2=1783296000&amp;interval=1d&amp;events=history（2026-07-05T07:40:45+00:00）</a:t>
-            </a:r>
-          </a:p>
-          <a:p>
-            <a:pPr algn="l">
+              <a:t>ev-s-20260705-0376-1［market_data］</a:t>
+            </a:r>
+            <a:r>
+              <a:rPr sz="1050" b="0">
+                <a:solidFill>
+                  <a:srgbClr val="2A63E8"/>
+                </a:solidFill>
+                <a:latin typeface="Helvetica Neue"/>
+                <a:hlinkClick r:id="rId2"/>
+                <a:ea typeface="PingFang SC"/>
+              </a:rPr>
+              <a:t>https://query1.finance.yahoo.com/v8/finance/chart/NVDA?period1=1625443200&amp;period2=1783296000&amp;interval=1d&amp;events=history</a:t>
+            </a:r>
+            <a:r>
+              <a:rPr sz="1050" b="0">
+                <a:solidFill>
+                  <a:srgbClr val="5B6B81"/>
+                </a:solidFill>
+                <a:latin typeface="Helvetica Neue"/>
+                <a:ea typeface="PingFang SC"/>
+              </a:rPr>
+              <a:t>（2026-07-05T07:40:45+00:00）</a:t>
+            </a:r>
+          </a:p>
+          <a:p>
+            <a:pPr>
               <a:lnSpc>
                 <a:spcPct val="110000"/>
               </a:lnSpc>
@@ -3410,11 +3431,31 @@
                 <a:latin typeface="Helvetica Neue"/>
                 <a:ea typeface="PingFang SC"/>
               </a:rPr>
-              <a:t>ev-s-20260705-0376-2［computation］evidence:ev-s-20260705-0376-1（2026-07-05T07:40:52+00:00）</a:t>
-            </a:r>
-          </a:p>
-          <a:p>
-            <a:pPr algn="l">
+              <a:t>ev-s-20260705-0376-2［computation］</a:t>
+            </a:r>
+            <a:r>
+              <a:rPr sz="1050" b="0">
+                <a:solidFill>
+                  <a:srgbClr val="5B6B81"/>
+                </a:solidFill>
+                <a:latin typeface="Helvetica Neue"/>
+                <a:ea typeface="PingFang SC"/>
+              </a:rPr>
+              <a:t>evidence:ev-s-20260705-0376-1</a:t>
+            </a:r>
+            <a:r>
+              <a:rPr sz="1050" b="0">
+                <a:solidFill>
+                  <a:srgbClr val="5B6B81"/>
+                </a:solidFill>
+                <a:latin typeface="Helvetica Neue"/>
+                <a:ea typeface="PingFang SC"/>
+              </a:rPr>
+              <a:t>（2026-07-05T07:40:52+00:00）</a:t>
+            </a:r>
+          </a:p>
+          <a:p>
+            <a:pPr>
               <a:lnSpc>
                 <a:spcPct val="110000"/>
               </a:lnSpc>
@@ -3430,11 +3471,32 @@
                 <a:latin typeface="Helvetica Neue"/>
                 <a:ea typeface="PingFang SC"/>
               </a:rPr>
-              <a:t>ev-s-20260705-0376-3［search］https://medium.com/@mayadakhatib/deepseek-r1-a-short-summary-73b6b8ced9cf（2026-07-05T07:41:58+00:00）</a:t>
-            </a:r>
-          </a:p>
-          <a:p>
-            <a:pPr algn="l">
+              <a:t>ev-s-20260705-0376-3［search］</a:t>
+            </a:r>
+            <a:r>
+              <a:rPr sz="1050" b="0">
+                <a:solidFill>
+                  <a:srgbClr val="2A63E8"/>
+                </a:solidFill>
+                <a:latin typeface="Helvetica Neue"/>
+                <a:hlinkClick r:id="rId3"/>
+                <a:ea typeface="PingFang SC"/>
+              </a:rPr>
+              <a:t>https://medium.com/@mayadakhatib/deepseek-r1-a-short-summary-73b6b8ced9cf</a:t>
+            </a:r>
+            <a:r>
+              <a:rPr sz="1050" b="0">
+                <a:solidFill>
+                  <a:srgbClr val="5B6B81"/>
+                </a:solidFill>
+                <a:latin typeface="Helvetica Neue"/>
+                <a:ea typeface="PingFang SC"/>
+              </a:rPr>
+              <a:t>（2026-07-05T07:41:58+00:00）</a:t>
+            </a:r>
+          </a:p>
+          <a:p>
+            <a:pPr>
               <a:lnSpc>
                 <a:spcPct val="110000"/>
               </a:lnSpc>
@@ -3450,11 +3512,32 @@
                 <a:latin typeface="Helvetica Neue"/>
                 <a:ea typeface="PingFang SC"/>
               </a:rPr>
-              <a:t>ev-s-20260705-0376-4［search］https://www.history.com/this-day-in-history/november-30/chatgpt-released-openai（2026-07-05T07:42:00+00:00）</a:t>
-            </a:r>
-          </a:p>
-          <a:p>
-            <a:pPr algn="l">
+              <a:t>ev-s-20260705-0376-4［search］</a:t>
+            </a:r>
+            <a:r>
+              <a:rPr sz="1050" b="0">
+                <a:solidFill>
+                  <a:srgbClr val="2A63E8"/>
+                </a:solidFill>
+                <a:latin typeface="Helvetica Neue"/>
+                <a:hlinkClick r:id="rId4"/>
+                <a:ea typeface="PingFang SC"/>
+              </a:rPr>
+              <a:t>https://www.history.com/this-day-in-history/november-30/chatgpt-released-openai</a:t>
+            </a:r>
+            <a:r>
+              <a:rPr sz="1050" b="0">
+                <a:solidFill>
+                  <a:srgbClr val="5B6B81"/>
+                </a:solidFill>
+                <a:latin typeface="Helvetica Neue"/>
+                <a:ea typeface="PingFang SC"/>
+              </a:rPr>
+              <a:t>（2026-07-05T07:42:00+00:00）</a:t>
+            </a:r>
+          </a:p>
+          <a:p>
+            <a:pPr>
               <a:lnSpc>
                 <a:spcPct val="110000"/>
               </a:lnSpc>
@@ -3470,11 +3553,32 @@
                 <a:latin typeface="Helvetica Neue"/>
                 <a:ea typeface="PingFang SC"/>
               </a:rPr>
-              <a:t>ev-s-20260705-0376-5［search］https://www.tweaktown.com/news/96303/nvidia-teases-its-upcoming-gtc-2024-event-is-all-about-ai-expect-blackwell-b100-gpu-unveil/index.html（2026-07-05T07:42:00+00:00）</a:t>
-            </a:r>
-          </a:p>
-          <a:p>
-            <a:pPr algn="l">
+              <a:t>ev-s-20260705-0376-5［search］</a:t>
+            </a:r>
+            <a:r>
+              <a:rPr sz="1050" b="0">
+                <a:solidFill>
+                  <a:srgbClr val="2A63E8"/>
+                </a:solidFill>
+                <a:latin typeface="Helvetica Neue"/>
+                <a:hlinkClick r:id="rId5"/>
+                <a:ea typeface="PingFang SC"/>
+              </a:rPr>
+              <a:t>https://www.tweaktown.com/news/96303/nvidia-teases-its-upcoming-gtc-2024-event-is-all-about-ai-expect-blackwell-b100-gpu-unveil/index.html</a:t>
+            </a:r>
+            <a:r>
+              <a:rPr sz="1050" b="0">
+                <a:solidFill>
+                  <a:srgbClr val="5B6B81"/>
+                </a:solidFill>
+                <a:latin typeface="Helvetica Neue"/>
+                <a:ea typeface="PingFang SC"/>
+              </a:rPr>
+              <a:t>（2026-07-05T07:42:00+00:00）</a:t>
+            </a:r>
+          </a:p>
+          <a:p>
+            <a:pPr>
               <a:lnSpc>
                 <a:spcPct val="110000"/>
               </a:lnSpc>
@@ -3490,11 +3594,32 @@
                 <a:latin typeface="Helvetica Neue"/>
                 <a:ea typeface="PingFang SC"/>
               </a:rPr>
-              <a:t>ev-s-20260705-0376-6［news］https://hn.algolia.com/api/v1/search_by_date?query=nvidia&amp;tags=story&amp;hitsPerPage=30&amp;numericFilters=created_at_i%3E%3D1628726400%2Ccreated_at_i%3C%3D1640044799（2026-07-05T07:42:06+00:00）</a:t>
-            </a:r>
-          </a:p>
-          <a:p>
-            <a:pPr algn="l">
+              <a:t>ev-s-20260705-0376-6［news］</a:t>
+            </a:r>
+            <a:r>
+              <a:rPr sz="1050" b="0">
+                <a:solidFill>
+                  <a:srgbClr val="2A63E8"/>
+                </a:solidFill>
+                <a:latin typeface="Helvetica Neue"/>
+                <a:hlinkClick r:id="rId6"/>
+                <a:ea typeface="PingFang SC"/>
+              </a:rPr>
+              <a:t>https://hn.algolia.com/api/v1/search_by_date?query=nvidia&amp;tags=story&amp;hitsPerPage=30&amp;numericFilters=created_at_i%3E%3D1628726400%2Ccreated_at_i%3C%3D1640044799</a:t>
+            </a:r>
+            <a:r>
+              <a:rPr sz="1050" b="0">
+                <a:solidFill>
+                  <a:srgbClr val="5B6B81"/>
+                </a:solidFill>
+                <a:latin typeface="Helvetica Neue"/>
+                <a:ea typeface="PingFang SC"/>
+              </a:rPr>
+              <a:t>（2026-07-05T07:42:06+00:00）</a:t>
+            </a:r>
+          </a:p>
+          <a:p>
+            <a:pPr>
               <a:lnSpc>
                 <a:spcPct val="110000"/>
               </a:lnSpc>
@@ -3510,11 +3635,32 @@
                 <a:latin typeface="Helvetica Neue"/>
                 <a:ea typeface="PingFang SC"/>
               </a:rPr>
-              <a:t>ev-s-20260705-0376-7［news］https://hn.algolia.com/api/v1/search_by_date?query=GPU&amp;tags=story&amp;hitsPerPage=30&amp;numericFilters=created_at_i%3E%3D1628726400%2Ccreated_at_i%3C%3D1640044799（2026-07-05T07:42:06+00:00）</a:t>
-            </a:r>
-          </a:p>
-          <a:p>
-            <a:pPr algn="l">
+              <a:t>ev-s-20260705-0376-7［news］</a:t>
+            </a:r>
+            <a:r>
+              <a:rPr sz="1050" b="0">
+                <a:solidFill>
+                  <a:srgbClr val="2A63E8"/>
+                </a:solidFill>
+                <a:latin typeface="Helvetica Neue"/>
+                <a:hlinkClick r:id="rId7"/>
+                <a:ea typeface="PingFang SC"/>
+              </a:rPr>
+              <a:t>https://hn.algolia.com/api/v1/search_by_date?query=GPU&amp;tags=story&amp;hitsPerPage=30&amp;numericFilters=created_at_i%3E%3D1628726400%2Ccreated_at_i%3C%3D1640044799</a:t>
+            </a:r>
+            <a:r>
+              <a:rPr sz="1050" b="0">
+                <a:solidFill>
+                  <a:srgbClr val="5B6B81"/>
+                </a:solidFill>
+                <a:latin typeface="Helvetica Neue"/>
+                <a:ea typeface="PingFang SC"/>
+              </a:rPr>
+              <a:t>（2026-07-05T07:42:06+00:00）</a:t>
+            </a:r>
+          </a:p>
+          <a:p>
+            <a:pPr>
               <a:lnSpc>
                 <a:spcPct val="110000"/>
               </a:lnSpc>
@@ -3530,11 +3676,32 @@
                 <a:latin typeface="Helvetica Neue"/>
                 <a:ea typeface="PingFang SC"/>
               </a:rPr>
-              <a:t>ev-s-20260705-0376-8［news］https://hn.algolia.com/api/v1/search_by_date?query=nvidia+earnings&amp;tags=story&amp;hitsPerPage=30&amp;numericFilters=created_at_i%3E%3D1627776000%2Ccreated_at_i%3C%3D1638316799（2026-07-05T07:42:13+00:00）</a:t>
-            </a:r>
-          </a:p>
-          <a:p>
-            <a:pPr algn="l">
+              <a:t>ev-s-20260705-0376-8［news］</a:t>
+            </a:r>
+            <a:r>
+              <a:rPr sz="1050" b="0">
+                <a:solidFill>
+                  <a:srgbClr val="2A63E8"/>
+                </a:solidFill>
+                <a:latin typeface="Helvetica Neue"/>
+                <a:hlinkClick r:id="rId8"/>
+                <a:ea typeface="PingFang SC"/>
+              </a:rPr>
+              <a:t>https://hn.algolia.com/api/v1/search_by_date?query=nvidia+earnings&amp;tags=story&amp;hitsPerPage=30&amp;numericFilters=created_at_i%3E%3D1627776000%2Ccreated_at_i%3C%3D1638316799</a:t>
+            </a:r>
+            <a:r>
+              <a:rPr sz="1050" b="0">
+                <a:solidFill>
+                  <a:srgbClr val="5B6B81"/>
+                </a:solidFill>
+                <a:latin typeface="Helvetica Neue"/>
+                <a:ea typeface="PingFang SC"/>
+              </a:rPr>
+              <a:t>（2026-07-05T07:42:13+00:00）</a:t>
+            </a:r>
+          </a:p>
+          <a:p>
+            <a:pPr>
               <a:lnSpc>
                 <a:spcPct val="110000"/>
               </a:lnSpc>
@@ -3550,11 +3717,32 @@
                 <a:latin typeface="Helvetica Neue"/>
                 <a:ea typeface="PingFang SC"/>
               </a:rPr>
-              <a:t>ev-s-20260705-0376-9［news］https://hn.algolia.com/api/v1/search_by_date?query=crypto&amp;tags=story&amp;hitsPerPage=30&amp;numericFilters=created_at_i%3E%3D1628726400%2Ccreated_at_i%3C%3D1640044799（2026-07-05T07:42:13+00:00）</a:t>
-            </a:r>
-          </a:p>
-          <a:p>
-            <a:pPr algn="l">
+              <a:t>ev-s-20260705-0376-9［news］</a:t>
+            </a:r>
+            <a:r>
+              <a:rPr sz="1050" b="0">
+                <a:solidFill>
+                  <a:srgbClr val="2A63E8"/>
+                </a:solidFill>
+                <a:latin typeface="Helvetica Neue"/>
+                <a:hlinkClick r:id="rId9"/>
+                <a:ea typeface="PingFang SC"/>
+              </a:rPr>
+              <a:t>https://hn.algolia.com/api/v1/search_by_date?query=crypto&amp;tags=story&amp;hitsPerPage=30&amp;numericFilters=created_at_i%3E%3D1628726400%2Ccreated_at_i%3C%3D1640044799</a:t>
+            </a:r>
+            <a:r>
+              <a:rPr sz="1050" b="0">
+                <a:solidFill>
+                  <a:srgbClr val="5B6B81"/>
+                </a:solidFill>
+                <a:latin typeface="Helvetica Neue"/>
+                <a:ea typeface="PingFang SC"/>
+              </a:rPr>
+              <a:t>（2026-07-05T07:42:13+00:00）</a:t>
+            </a:r>
+          </a:p>
+          <a:p>
+            <a:pPr>
               <a:lnSpc>
                 <a:spcPct val="110000"/>
               </a:lnSpc>
@@ -3570,11 +3758,32 @@
                 <a:latin typeface="Helvetica Neue"/>
                 <a:ea typeface="PingFang SC"/>
               </a:rPr>
-              <a:t>ev-s-20260705-0376-10［news］https://hn.algolia.com/api/v1/search_by_date?query=nvidia&amp;tags=story&amp;hitsPerPage=30&amp;numericFilters=created_at_i%3E%3D1643155200%2Ccreated_at_i%3C%3D1655769599（2026-07-05T07:42:30+00:00）</a:t>
-            </a:r>
-          </a:p>
-          <a:p>
-            <a:pPr algn="l">
+              <a:t>ev-s-20260705-0376-10［news］</a:t>
+            </a:r>
+            <a:r>
+              <a:rPr sz="1050" b="0">
+                <a:solidFill>
+                  <a:srgbClr val="2A63E8"/>
+                </a:solidFill>
+                <a:latin typeface="Helvetica Neue"/>
+                <a:hlinkClick r:id="rId10"/>
+                <a:ea typeface="PingFang SC"/>
+              </a:rPr>
+              <a:t>https://hn.algolia.com/api/v1/search_by_date?query=nvidia&amp;tags=story&amp;hitsPerPage=30&amp;numericFilters=created_at_i%3E%3D1643155200%2Ccreated_at_i%3C%3D1655769599</a:t>
+            </a:r>
+            <a:r>
+              <a:rPr sz="1050" b="0">
+                <a:solidFill>
+                  <a:srgbClr val="5B6B81"/>
+                </a:solidFill>
+                <a:latin typeface="Helvetica Neue"/>
+                <a:ea typeface="PingFang SC"/>
+              </a:rPr>
+              <a:t>（2026-07-05T07:42:30+00:00）</a:t>
+            </a:r>
+          </a:p>
+          <a:p>
+            <a:pPr>
               <a:lnSpc>
                 <a:spcPct val="110000"/>
               </a:lnSpc>
@@ -3590,11 +3799,32 @@
                 <a:latin typeface="Helvetica Neue"/>
                 <a:ea typeface="PingFang SC"/>
               </a:rPr>
-              <a:t>ev-s-20260705-0376-11［news］https://hn.algolia.com/api/v1/search_by_date?query=hopper&amp;tags=story&amp;hitsPerPage=30&amp;numericFilters=created_at_i%3E%3D1643155200%2Ccreated_at_i%3C%3D1655769599（2026-07-05T07:42:30+00:00）</a:t>
-            </a:r>
-          </a:p>
-          <a:p>
-            <a:pPr algn="l">
+              <a:t>ev-s-20260705-0376-11［news］</a:t>
+            </a:r>
+            <a:r>
+              <a:rPr sz="1050" b="0">
+                <a:solidFill>
+                  <a:srgbClr val="2A63E8"/>
+                </a:solidFill>
+                <a:latin typeface="Helvetica Neue"/>
+                <a:hlinkClick r:id="rId11"/>
+                <a:ea typeface="PingFang SC"/>
+              </a:rPr>
+              <a:t>https://hn.algolia.com/api/v1/search_by_date?query=hopper&amp;tags=story&amp;hitsPerPage=30&amp;numericFilters=created_at_i%3E%3D1643155200%2Ccreated_at_i%3C%3D1655769599</a:t>
+            </a:r>
+            <a:r>
+              <a:rPr sz="1050" b="0">
+                <a:solidFill>
+                  <a:srgbClr val="5B6B81"/>
+                </a:solidFill>
+                <a:latin typeface="Helvetica Neue"/>
+                <a:ea typeface="PingFang SC"/>
+              </a:rPr>
+              <a:t>（2026-07-05T07:42:30+00:00）</a:t>
+            </a:r>
+          </a:p>
+          <a:p>
+            <a:pPr>
               <a:lnSpc>
                 <a:spcPct val="110000"/>
               </a:lnSpc>
@@ -3610,7 +3840,28 @@
                 <a:latin typeface="Helvetica Neue"/>
                 <a:ea typeface="PingFang SC"/>
               </a:rPr>
-              <a:t>ev-s-20260705-0376-12［news］https://hn.algolia.com/api/v1/search_by_date?query=GTC&amp;tags=story&amp;hitsPerPage=20&amp;numericFilters=created_at_i%3E%3D1647302400%2Ccreated_at_i%3C%3D1650067199（2026-07-05T07:42:36+00:00）</a:t>
+              <a:t>ev-s-20260705-0376-12［news］</a:t>
+            </a:r>
+            <a:r>
+              <a:rPr sz="1050" b="0">
+                <a:solidFill>
+                  <a:srgbClr val="2A63E8"/>
+                </a:solidFill>
+                <a:latin typeface="Helvetica Neue"/>
+                <a:hlinkClick r:id="rId12"/>
+                <a:ea typeface="PingFang SC"/>
+              </a:rPr>
+              <a:t>https://hn.algolia.com/api/v1/search_by_date?query=GTC&amp;tags=story&amp;hitsPerPage=20&amp;numericFilters=created_at_i%3E%3D1647302400%2Ccreated_at_i%3C%3D1650067199</a:t>
+            </a:r>
+            <a:r>
+              <a:rPr sz="1050" b="0">
+                <a:solidFill>
+                  <a:srgbClr val="5B6B81"/>
+                </a:solidFill>
+                <a:latin typeface="Helvetica Neue"/>
+                <a:ea typeface="PingFang SC"/>
+              </a:rPr>
+              <a:t>（2026-07-05T07:42:36+00:00）</a:t>
             </a:r>
           </a:p>
         </p:txBody>
@@ -3771,7 +4022,7 @@
           </a:bodyPr>
           <a:lstStyle/>
           <a:p>
-            <a:pPr algn="l">
+            <a:pPr>
               <a:lnSpc>
                 <a:spcPct val="110000"/>
               </a:lnSpc>
@@ -3787,11 +4038,32 @@
                 <a:latin typeface="Helvetica Neue"/>
                 <a:ea typeface="PingFang SC"/>
               </a:rPr>
-              <a:t>ev-s-20260705-0376-13［news］https://hn.algolia.com/api/v1/search_by_date?query=nvidia+arm&amp;tags=story&amp;hitsPerPage=20&amp;numericFilters=created_at_i%3E%3D1643673600%2Ccreated_at_i%3C%3D1646092799（2026-07-05T07:42:36+00:00）</a:t>
-            </a:r>
-          </a:p>
-          <a:p>
-            <a:pPr algn="l">
+              <a:t>ev-s-20260705-0376-13［news］</a:t>
+            </a:r>
+            <a:r>
+              <a:rPr sz="1050" b="0">
+                <a:solidFill>
+                  <a:srgbClr val="2A63E8"/>
+                </a:solidFill>
+                <a:latin typeface="Helvetica Neue"/>
+                <a:hlinkClick r:id="rId2"/>
+                <a:ea typeface="PingFang SC"/>
+              </a:rPr>
+              <a:t>https://hn.algolia.com/api/v1/search_by_date?query=nvidia+arm&amp;tags=story&amp;hitsPerPage=20&amp;numericFilters=created_at_i%3E%3D1643673600%2Ccreated_at_i%3C%3D1646092799</a:t>
+            </a:r>
+            <a:r>
+              <a:rPr sz="1050" b="0">
+                <a:solidFill>
+                  <a:srgbClr val="5B6B81"/>
+                </a:solidFill>
+                <a:latin typeface="Helvetica Neue"/>
+                <a:ea typeface="PingFang SC"/>
+              </a:rPr>
+              <a:t>（2026-07-05T07:42:36+00:00）</a:t>
+            </a:r>
+          </a:p>
+          <a:p>
+            <a:pPr>
               <a:lnSpc>
                 <a:spcPct val="110000"/>
               </a:lnSpc>
@@ -3807,11 +4079,32 @@
                 <a:latin typeface="Helvetica Neue"/>
                 <a:ea typeface="PingFang SC"/>
               </a:rPr>
-              <a:t>ev-s-20260705-0376-14［news］https://hn.algolia.com/api/v1/search_by_date?query=H100&amp;tags=story&amp;hitsPerPage=20&amp;numericFilters=created_at_i%3E%3D1647302400%2Ccreated_at_i%3C%3D1650067199（2026-07-05T07:42:49+00:00）</a:t>
-            </a:r>
-          </a:p>
-          <a:p>
-            <a:pPr algn="l">
+              <a:t>ev-s-20260705-0376-14［news］</a:t>
+            </a:r>
+            <a:r>
+              <a:rPr sz="1050" b="0">
+                <a:solidFill>
+                  <a:srgbClr val="2A63E8"/>
+                </a:solidFill>
+                <a:latin typeface="Helvetica Neue"/>
+                <a:hlinkClick r:id="rId3"/>
+                <a:ea typeface="PingFang SC"/>
+              </a:rPr>
+              <a:t>https://hn.algolia.com/api/v1/search_by_date?query=H100&amp;tags=story&amp;hitsPerPage=20&amp;numericFilters=created_at_i%3E%3D1647302400%2Ccreated_at_i%3C%3D1650067199</a:t>
+            </a:r>
+            <a:r>
+              <a:rPr sz="1050" b="0">
+                <a:solidFill>
+                  <a:srgbClr val="5B6B81"/>
+                </a:solidFill>
+                <a:latin typeface="Helvetica Neue"/>
+                <a:ea typeface="PingFang SC"/>
+              </a:rPr>
+              <a:t>（2026-07-05T07:42:49+00:00）</a:t>
+            </a:r>
+          </a:p>
+          <a:p>
+            <a:pPr>
               <a:lnSpc>
                 <a:spcPct val="110000"/>
               </a:lnSpc>
@@ -3827,11 +4120,32 @@
                 <a:latin typeface="Helvetica Neue"/>
                 <a:ea typeface="PingFang SC"/>
               </a:rPr>
-              <a:t>ev-s-20260705-0376-15［search］https://www.youtube.com/watch?v=dCFm_YKw2WA（2026-07-05T07:42:52+00:00）</a:t>
-            </a:r>
-          </a:p>
-          <a:p>
-            <a:pPr algn="l">
+              <a:t>ev-s-20260705-0376-15［search］</a:t>
+            </a:r>
+            <a:r>
+              <a:rPr sz="1050" b="0">
+                <a:solidFill>
+                  <a:srgbClr val="2A63E8"/>
+                </a:solidFill>
+                <a:latin typeface="Helvetica Neue"/>
+                <a:hlinkClick r:id="rId4"/>
+                <a:ea typeface="PingFang SC"/>
+              </a:rPr>
+              <a:t>https://www.youtube.com/watch?v=dCFm_YKw2WA</a:t>
+            </a:r>
+            <a:r>
+              <a:rPr sz="1050" b="0">
+                <a:solidFill>
+                  <a:srgbClr val="5B6B81"/>
+                </a:solidFill>
+                <a:latin typeface="Helvetica Neue"/>
+                <a:ea typeface="PingFang SC"/>
+              </a:rPr>
+              <a:t>（2026-07-05T07:42:52+00:00）</a:t>
+            </a:r>
+          </a:p>
+          <a:p>
+            <a:pPr>
               <a:lnSpc>
                 <a:spcPct val="110000"/>
               </a:lnSpc>
@@ -3847,11 +4161,32 @@
                 <a:latin typeface="Helvetica Neue"/>
                 <a:ea typeface="PingFang SC"/>
               </a:rPr>
-              <a:t>ev-s-20260705-0376-16［news］https://hn.algolia.com/api/v1/search_by_date?query=chatgpt&amp;tags=story&amp;hitsPerPage=20&amp;numericFilters=created_at_i%3E%3D1669161600%2Ccreated_at_i%3C%3D1671753599（2026-07-05T07:43:03+00:00）</a:t>
-            </a:r>
-          </a:p>
-          <a:p>
-            <a:pPr algn="l">
+              <a:t>ev-s-20260705-0376-16［news］</a:t>
+            </a:r>
+            <a:r>
+              <a:rPr sz="1050" b="0">
+                <a:solidFill>
+                  <a:srgbClr val="2A63E8"/>
+                </a:solidFill>
+                <a:latin typeface="Helvetica Neue"/>
+                <a:hlinkClick r:id="rId5"/>
+                <a:ea typeface="PingFang SC"/>
+              </a:rPr>
+              <a:t>https://hn.algolia.com/api/v1/search_by_date?query=chatgpt&amp;tags=story&amp;hitsPerPage=20&amp;numericFilters=created_at_i%3E%3D1669161600%2Ccreated_at_i%3C%3D1671753599</a:t>
+            </a:r>
+            <a:r>
+              <a:rPr sz="1050" b="0">
+                <a:solidFill>
+                  <a:srgbClr val="5B6B81"/>
+                </a:solidFill>
+                <a:latin typeface="Helvetica Neue"/>
+                <a:ea typeface="PingFang SC"/>
+              </a:rPr>
+              <a:t>（2026-07-05T07:43:03+00:00）</a:t>
+            </a:r>
+          </a:p>
+          <a:p>
+            <a:pPr>
               <a:lnSpc>
                 <a:spcPct val="110000"/>
               </a:lnSpc>
@@ -3867,11 +4202,32 @@
                 <a:latin typeface="Helvetica Neue"/>
                 <a:ea typeface="PingFang SC"/>
               </a:rPr>
-              <a:t>ev-s-20260705-0376-17［news］https://hn.algolia.com/api/v1/search_by_date?query=nvidia&amp;tags=story&amp;hitsPerPage=30&amp;numericFilters=created_at_i%3E%3D1657584000%2Ccreated_at_i%3C%3D1672358399（2026-07-05T07:43:03+00:00）</a:t>
-            </a:r>
-          </a:p>
-          <a:p>
-            <a:pPr algn="l">
+              <a:t>ev-s-20260705-0376-17［news］</a:t>
+            </a:r>
+            <a:r>
+              <a:rPr sz="1050" b="0">
+                <a:solidFill>
+                  <a:srgbClr val="2A63E8"/>
+                </a:solidFill>
+                <a:latin typeface="Helvetica Neue"/>
+                <a:hlinkClick r:id="rId6"/>
+                <a:ea typeface="PingFang SC"/>
+              </a:rPr>
+              <a:t>https://hn.algolia.com/api/v1/search_by_date?query=nvidia&amp;tags=story&amp;hitsPerPage=30&amp;numericFilters=created_at_i%3E%3D1657584000%2Ccreated_at_i%3C%3D1672358399</a:t>
+            </a:r>
+            <a:r>
+              <a:rPr sz="1050" b="0">
+                <a:solidFill>
+                  <a:srgbClr val="5B6B81"/>
+                </a:solidFill>
+                <a:latin typeface="Helvetica Neue"/>
+                <a:ea typeface="PingFang SC"/>
+              </a:rPr>
+              <a:t>（2026-07-05T07:43:03+00:00）</a:t>
+            </a:r>
+          </a:p>
+          <a:p>
+            <a:pPr>
               <a:lnSpc>
                 <a:spcPct val="110000"/>
               </a:lnSpc>
@@ -3887,11 +4243,32 @@
                 <a:latin typeface="Helvetica Neue"/>
                 <a:ea typeface="PingFang SC"/>
               </a:rPr>
-              <a:t>ev-s-20260705-0376-18［news］https://hn.algolia.com/api/v1/search_by_date?query=RTX+4090&amp;tags=story&amp;hitsPerPage=20&amp;numericFilters=created_at_i%3E%3D1661990400%2Ccreated_at_i%3C%3D1669852799（2026-07-05T07:43:07+00:00）</a:t>
-            </a:r>
-          </a:p>
-          <a:p>
-            <a:pPr algn="l">
+              <a:t>ev-s-20260705-0376-18［news］</a:t>
+            </a:r>
+            <a:r>
+              <a:rPr sz="1050" b="0">
+                <a:solidFill>
+                  <a:srgbClr val="2A63E8"/>
+                </a:solidFill>
+                <a:latin typeface="Helvetica Neue"/>
+                <a:hlinkClick r:id="rId7"/>
+                <a:ea typeface="PingFang SC"/>
+              </a:rPr>
+              <a:t>https://hn.algolia.com/api/v1/search_by_date?query=RTX+4090&amp;tags=story&amp;hitsPerPage=20&amp;numericFilters=created_at_i%3E%3D1661990400%2Ccreated_at_i%3C%3D1669852799</a:t>
+            </a:r>
+            <a:r>
+              <a:rPr sz="1050" b="0">
+                <a:solidFill>
+                  <a:srgbClr val="5B6B81"/>
+                </a:solidFill>
+                <a:latin typeface="Helvetica Neue"/>
+                <a:ea typeface="PingFang SC"/>
+              </a:rPr>
+              <a:t>（2026-07-05T07:43:07+00:00）</a:t>
+            </a:r>
+          </a:p>
+          <a:p>
+            <a:pPr>
               <a:lnSpc>
                 <a:spcPct val="110000"/>
               </a:lnSpc>
@@ -3907,11 +4284,32 @@
                 <a:latin typeface="Helvetica Neue"/>
                 <a:ea typeface="PingFang SC"/>
               </a:rPr>
-              <a:t>ev-s-20260705-0376-19［news］https://hn.algolia.com/api/v1/search_by_date?query=export+control&amp;tags=story&amp;hitsPerPage=20&amp;numericFilters=created_at_i%3E%3D1661990400%2Ccreated_at_i%3C%3D1669852799（2026-07-05T07:43:07+00:00）</a:t>
-            </a:r>
-          </a:p>
-          <a:p>
-            <a:pPr algn="l">
+              <a:t>ev-s-20260705-0376-19［news］</a:t>
+            </a:r>
+            <a:r>
+              <a:rPr sz="1050" b="0">
+                <a:solidFill>
+                  <a:srgbClr val="2A63E8"/>
+                </a:solidFill>
+                <a:latin typeface="Helvetica Neue"/>
+                <a:hlinkClick r:id="rId8"/>
+                <a:ea typeface="PingFang SC"/>
+              </a:rPr>
+              <a:t>https://hn.algolia.com/api/v1/search_by_date?query=export+control&amp;tags=story&amp;hitsPerPage=20&amp;numericFilters=created_at_i%3E%3D1661990400%2Ccreated_at_i%3C%3D1669852799</a:t>
+            </a:r>
+            <a:r>
+              <a:rPr sz="1050" b="0">
+                <a:solidFill>
+                  <a:srgbClr val="5B6B81"/>
+                </a:solidFill>
+                <a:latin typeface="Helvetica Neue"/>
+                <a:ea typeface="PingFang SC"/>
+              </a:rPr>
+              <a:t>（2026-07-05T07:43:07+00:00）</a:t>
+            </a:r>
+          </a:p>
+          <a:p>
+            <a:pPr>
               <a:lnSpc>
                 <a:spcPct val="110000"/>
               </a:lnSpc>
@@ -3927,11 +4325,32 @@
                 <a:latin typeface="Helvetica Neue"/>
                 <a:ea typeface="PingFang SC"/>
               </a:rPr>
-              <a:t>ev-s-20260705-0376-20［news］https://hn.algolia.com/api/v1/search_by_date?query=nvidia&amp;tags=story&amp;hitsPerPage=20&amp;numericFilters=created_at_i%3E%3D1672876800%2Ccreated_at_i%3C%3D1674172799（2026-07-05T07:43:23+00:00）</a:t>
-            </a:r>
-          </a:p>
-          <a:p>
-            <a:pPr algn="l">
+              <a:t>ev-s-20260705-0376-20［news］</a:t>
+            </a:r>
+            <a:r>
+              <a:rPr sz="1050" b="0">
+                <a:solidFill>
+                  <a:srgbClr val="2A63E8"/>
+                </a:solidFill>
+                <a:latin typeface="Helvetica Neue"/>
+                <a:hlinkClick r:id="rId9"/>
+                <a:ea typeface="PingFang SC"/>
+              </a:rPr>
+              <a:t>https://hn.algolia.com/api/v1/search_by_date?query=nvidia&amp;tags=story&amp;hitsPerPage=20&amp;numericFilters=created_at_i%3E%3D1672876800%2Ccreated_at_i%3C%3D1674172799</a:t>
+            </a:r>
+            <a:r>
+              <a:rPr sz="1050" b="0">
+                <a:solidFill>
+                  <a:srgbClr val="5B6B81"/>
+                </a:solidFill>
+                <a:latin typeface="Helvetica Neue"/>
+                <a:ea typeface="PingFang SC"/>
+              </a:rPr>
+              <a:t>（2026-07-05T07:43:23+00:00）</a:t>
+            </a:r>
+          </a:p>
+          <a:p>
+            <a:pPr>
               <a:lnSpc>
                 <a:spcPct val="110000"/>
               </a:lnSpc>
@@ -3947,11 +4366,32 @@
                 <a:latin typeface="Helvetica Neue"/>
                 <a:ea typeface="PingFang SC"/>
               </a:rPr>
-              <a:t>ev-s-20260705-0376-21［search］https://investor.nvidia.com/news/press-release-details/2023/NVIDIA-Announces-Upcoming-Events-for-Financial-Community-c994c9305/default.aspx（2026-07-05T07:43:24+00:00）</a:t>
-            </a:r>
-          </a:p>
-          <a:p>
-            <a:pPr algn="l">
+              <a:t>ev-s-20260705-0376-21［search］</a:t>
+            </a:r>
+            <a:r>
+              <a:rPr sz="1050" b="0">
+                <a:solidFill>
+                  <a:srgbClr val="2A63E8"/>
+                </a:solidFill>
+                <a:latin typeface="Helvetica Neue"/>
+                <a:hlinkClick r:id="rId10"/>
+                <a:ea typeface="PingFang SC"/>
+              </a:rPr>
+              <a:t>https://investor.nvidia.com/news/press-release-details/2023/NVIDIA-Announces-Upcoming-Events-for-Financial-Community-c994c9305/default.aspx</a:t>
+            </a:r>
+            <a:r>
+              <a:rPr sz="1050" b="0">
+                <a:solidFill>
+                  <a:srgbClr val="5B6B81"/>
+                </a:solidFill>
+                <a:latin typeface="Helvetica Neue"/>
+                <a:ea typeface="PingFang SC"/>
+              </a:rPr>
+              <a:t>（2026-07-05T07:43:24+00:00）</a:t>
+            </a:r>
+          </a:p>
+          <a:p>
+            <a:pPr>
               <a:lnSpc>
                 <a:spcPct val="110000"/>
               </a:lnSpc>
@@ -3967,11 +4407,32 @@
                 <a:latin typeface="Helvetica Neue"/>
                 <a:ea typeface="PingFang SC"/>
               </a:rPr>
-              <a:t>ev-s-20260705-0376-22［news］https://hn.algolia.com/api/v1/search_by_date?query=nvidia+earnings&amp;tags=story&amp;hitsPerPage=20&amp;numericFilters=created_at_i%3E%3D1683763200%2Ccreated_at_i%3C%3D1693612799（2026-07-05T07:43:38+00:00）</a:t>
-            </a:r>
-          </a:p>
-          <a:p>
-            <a:pPr algn="l">
+              <a:t>ev-s-20260705-0376-22［news］</a:t>
+            </a:r>
+            <a:r>
+              <a:rPr sz="1050" b="0">
+                <a:solidFill>
+                  <a:srgbClr val="2A63E8"/>
+                </a:solidFill>
+                <a:latin typeface="Helvetica Neue"/>
+                <a:hlinkClick r:id="rId11"/>
+                <a:ea typeface="PingFang SC"/>
+              </a:rPr>
+              <a:t>https://hn.algolia.com/api/v1/search_by_date?query=nvidia+earnings&amp;tags=story&amp;hitsPerPage=20&amp;numericFilters=created_at_i%3E%3D1683763200%2Ccreated_at_i%3C%3D1693612799</a:t>
+            </a:r>
+            <a:r>
+              <a:rPr sz="1050" b="0">
+                <a:solidFill>
+                  <a:srgbClr val="5B6B81"/>
+                </a:solidFill>
+                <a:latin typeface="Helvetica Neue"/>
+                <a:ea typeface="PingFang SC"/>
+              </a:rPr>
+              <a:t>（2026-07-05T07:43:38+00:00）</a:t>
+            </a:r>
+          </a:p>
+          <a:p>
+            <a:pPr>
               <a:lnSpc>
                 <a:spcPct val="110000"/>
               </a:lnSpc>
@@ -3987,11 +4448,32 @@
                 <a:latin typeface="Helvetica Neue"/>
                 <a:ea typeface="PingFang SC"/>
               </a:rPr>
-              <a:t>ev-s-20260705-0376-23［news］https://hn.algolia.com/api/v1/search_by_date?query=nvidia&amp;tags=story&amp;hitsPerPage=30&amp;numericFilters=created_at_i%3E%3D1683763200%2Ccreated_at_i%3C%3D1700092799（2026-07-05T07:43:38+00:00）</a:t>
-            </a:r>
-          </a:p>
-          <a:p>
-            <a:pPr algn="l">
+              <a:t>ev-s-20260705-0376-23［news］</a:t>
+            </a:r>
+            <a:r>
+              <a:rPr sz="1050" b="0">
+                <a:solidFill>
+                  <a:srgbClr val="2A63E8"/>
+                </a:solidFill>
+                <a:latin typeface="Helvetica Neue"/>
+                <a:hlinkClick r:id="rId12"/>
+                <a:ea typeface="PingFang SC"/>
+              </a:rPr>
+              <a:t>https://hn.algolia.com/api/v1/search_by_date?query=nvidia&amp;tags=story&amp;hitsPerPage=30&amp;numericFilters=created_at_i%3E%3D1683763200%2Ccreated_at_i%3C%3D1700092799</a:t>
+            </a:r>
+            <a:r>
+              <a:rPr sz="1050" b="0">
+                <a:solidFill>
+                  <a:srgbClr val="5B6B81"/>
+                </a:solidFill>
+                <a:latin typeface="Helvetica Neue"/>
+                <a:ea typeface="PingFang SC"/>
+              </a:rPr>
+              <a:t>（2026-07-05T07:43:38+00:00）</a:t>
+            </a:r>
+          </a:p>
+          <a:p>
+            <a:pPr>
               <a:lnSpc>
                 <a:spcPct val="110000"/>
               </a:lnSpc>
@@ -4007,7 +4489,28 @@
                 <a:latin typeface="Helvetica Neue"/>
                 <a:ea typeface="PingFang SC"/>
               </a:rPr>
-              <a:t>ev-s-20260705-0376-24［news］https://hn.algolia.com/api/v1/search_by_date?query=export&amp;tags=story&amp;hitsPerPage=20&amp;numericFilters=created_at_i%3E%3D1696118400%2Ccreated_at_i%3C%3D1699487999（2026-07-05T07:43:50+00:00）</a:t>
+              <a:t>ev-s-20260705-0376-24［news］</a:t>
+            </a:r>
+            <a:r>
+              <a:rPr sz="1050" b="0">
+                <a:solidFill>
+                  <a:srgbClr val="2A63E8"/>
+                </a:solidFill>
+                <a:latin typeface="Helvetica Neue"/>
+                <a:hlinkClick r:id="rId13"/>
+                <a:ea typeface="PingFang SC"/>
+              </a:rPr>
+              <a:t>https://hn.algolia.com/api/v1/search_by_date?query=export&amp;tags=story&amp;hitsPerPage=20&amp;numericFilters=created_at_i%3E%3D1696118400%2Ccreated_at_i%3C%3D1699487999</a:t>
+            </a:r>
+            <a:r>
+              <a:rPr sz="1050" b="0">
+                <a:solidFill>
+                  <a:srgbClr val="5B6B81"/>
+                </a:solidFill>
+                <a:latin typeface="Helvetica Neue"/>
+                <a:ea typeface="PingFang SC"/>
+              </a:rPr>
+              <a:t>（2026-07-05T07:43:50+00:00）</a:t>
             </a:r>
           </a:p>
         </p:txBody>
@@ -4168,7 +4671,7 @@
           </a:bodyPr>
           <a:lstStyle/>
           <a:p>
-            <a:pPr algn="l">
+            <a:pPr>
               <a:lnSpc>
                 <a:spcPct val="110000"/>
               </a:lnSpc>
@@ -4184,11 +4687,32 @@
                 <a:latin typeface="Helvetica Neue"/>
                 <a:ea typeface="PingFang SC"/>
               </a:rPr>
-              <a:t>ev-s-20260705-0376-25［news］https://hn.algolia.com/api/v1/search_by_date?query=nvidia+china&amp;tags=story&amp;hitsPerPage=20&amp;numericFilters=created_at_i%3E%3D1697328000%2Ccreated_at_i%3C%3D1699487999（2026-07-05T07:43:54+00:00）</a:t>
-            </a:r>
-          </a:p>
-          <a:p>
-            <a:pPr algn="l">
+              <a:t>ev-s-20260705-0376-25［news］</a:t>
+            </a:r>
+            <a:r>
+              <a:rPr sz="1050" b="0">
+                <a:solidFill>
+                  <a:srgbClr val="2A63E8"/>
+                </a:solidFill>
+                <a:latin typeface="Helvetica Neue"/>
+                <a:hlinkClick r:id="rId2"/>
+                <a:ea typeface="PingFang SC"/>
+              </a:rPr>
+              <a:t>https://hn.algolia.com/api/v1/search_by_date?query=nvidia+china&amp;tags=story&amp;hitsPerPage=20&amp;numericFilters=created_at_i%3E%3D1697328000%2Ccreated_at_i%3C%3D1699487999</a:t>
+            </a:r>
+            <a:r>
+              <a:rPr sz="1050" b="0">
+                <a:solidFill>
+                  <a:srgbClr val="5B6B81"/>
+                </a:solidFill>
+                <a:latin typeface="Helvetica Neue"/>
+                <a:ea typeface="PingFang SC"/>
+              </a:rPr>
+              <a:t>（2026-07-05T07:43:54+00:00）</a:t>
+            </a:r>
+          </a:p>
+          <a:p>
+            <a:pPr>
               <a:lnSpc>
                 <a:spcPct val="110000"/>
               </a:lnSpc>
@@ -4204,11 +4728,32 @@
                 <a:latin typeface="Helvetica Neue"/>
                 <a:ea typeface="PingFang SC"/>
               </a:rPr>
-              <a:t>ev-s-20260705-0376-26［news］https://hn.algolia.com/api/v1/search_by_date?query=nvidia&amp;tags=story&amp;hitsPerPage=30&amp;numericFilters=created_at_i%3E%3D1712880000%2Ccreated_at_i%3C%3D1714780799（2026-07-05T07:44:09+00:00）</a:t>
-            </a:r>
-          </a:p>
-          <a:p>
-            <a:pPr algn="l">
+              <a:t>ev-s-20260705-0376-26［news］</a:t>
+            </a:r>
+            <a:r>
+              <a:rPr sz="1050" b="0">
+                <a:solidFill>
+                  <a:srgbClr val="2A63E8"/>
+                </a:solidFill>
+                <a:latin typeface="Helvetica Neue"/>
+                <a:hlinkClick r:id="rId3"/>
+                <a:ea typeface="PingFang SC"/>
+              </a:rPr>
+              <a:t>https://hn.algolia.com/api/v1/search_by_date?query=nvidia&amp;tags=story&amp;hitsPerPage=30&amp;numericFilters=created_at_i%3E%3D1712880000%2Ccreated_at_i%3C%3D1714780799</a:t>
+            </a:r>
+            <a:r>
+              <a:rPr sz="1050" b="0">
+                <a:solidFill>
+                  <a:srgbClr val="5B6B81"/>
+                </a:solidFill>
+                <a:latin typeface="Helvetica Neue"/>
+                <a:ea typeface="PingFang SC"/>
+              </a:rPr>
+              <a:t>（2026-07-05T07:44:09+00:00）</a:t>
+            </a:r>
+          </a:p>
+          <a:p>
+            <a:pPr>
               <a:lnSpc>
                 <a:spcPct val="110000"/>
               </a:lnSpc>
@@ -4224,11 +4769,32 @@
                 <a:latin typeface="Helvetica Neue"/>
                 <a:ea typeface="PingFang SC"/>
               </a:rPr>
-              <a:t>ev-s-20260705-0376-27［news］https://hn.algolia.com/api/v1/search_by_date?query=Blackwell&amp;tags=story&amp;hitsPerPage=30&amp;numericFilters=created_at_i%3E%3D1709251200%2Ccreated_at_i%3C%3D1735689599（2026-07-05T07:51:43+00:00）</a:t>
-            </a:r>
-          </a:p>
-          <a:p>
-            <a:pPr algn="l">
+              <a:t>ev-s-20260705-0376-27［news］</a:t>
+            </a:r>
+            <a:r>
+              <a:rPr sz="1050" b="0">
+                <a:solidFill>
+                  <a:srgbClr val="2A63E8"/>
+                </a:solidFill>
+                <a:latin typeface="Helvetica Neue"/>
+                <a:hlinkClick r:id="rId4"/>
+                <a:ea typeface="PingFang SC"/>
+              </a:rPr>
+              <a:t>https://hn.algolia.com/api/v1/search_by_date?query=Blackwell&amp;tags=story&amp;hitsPerPage=30&amp;numericFilters=created_at_i%3E%3D1709251200%2Ccreated_at_i%3C%3D1735689599</a:t>
+            </a:r>
+            <a:r>
+              <a:rPr sz="1050" b="0">
+                <a:solidFill>
+                  <a:srgbClr val="5B6B81"/>
+                </a:solidFill>
+                <a:latin typeface="Helvetica Neue"/>
+                <a:ea typeface="PingFang SC"/>
+              </a:rPr>
+              <a:t>（2026-07-05T07:51:43+00:00）</a:t>
+            </a:r>
+          </a:p>
+          <a:p>
+            <a:pPr>
               <a:lnSpc>
                 <a:spcPct val="110000"/>
               </a:lnSpc>
@@ -4244,11 +4810,32 @@
                 <a:latin typeface="Helvetica Neue"/>
                 <a:ea typeface="PingFang SC"/>
               </a:rPr>
-              <a:t>ev-s-20260705-0376-28［news］https://hn.algolia.com/api/v1/search_by_date?query=B100&amp;tags=story&amp;hitsPerPage=30&amp;numericFilters=created_at_i%3E%3D1704067200%2Ccreated_at_i%3C%3D1735689599（2026-07-05T07:51:43+00:00）</a:t>
-            </a:r>
-          </a:p>
-          <a:p>
-            <a:pPr algn="l">
+              <a:t>ev-s-20260705-0376-28［news］</a:t>
+            </a:r>
+            <a:r>
+              <a:rPr sz="1050" b="0">
+                <a:solidFill>
+                  <a:srgbClr val="2A63E8"/>
+                </a:solidFill>
+                <a:latin typeface="Helvetica Neue"/>
+                <a:hlinkClick r:id="rId5"/>
+                <a:ea typeface="PingFang SC"/>
+              </a:rPr>
+              <a:t>https://hn.algolia.com/api/v1/search_by_date?query=B100&amp;tags=story&amp;hitsPerPage=30&amp;numericFilters=created_at_i%3E%3D1704067200%2Ccreated_at_i%3C%3D1735689599</a:t>
+            </a:r>
+            <a:r>
+              <a:rPr sz="1050" b="0">
+                <a:solidFill>
+                  <a:srgbClr val="5B6B81"/>
+                </a:solidFill>
+                <a:latin typeface="Helvetica Neue"/>
+                <a:ea typeface="PingFang SC"/>
+              </a:rPr>
+              <a:t>（2026-07-05T07:51:43+00:00）</a:t>
+            </a:r>
+          </a:p>
+          <a:p>
+            <a:pPr>
               <a:lnSpc>
                 <a:spcPct val="110000"/>
               </a:lnSpc>
@@ -4264,11 +4851,32 @@
                 <a:latin typeface="Helvetica Neue"/>
                 <a:ea typeface="PingFang SC"/>
               </a:rPr>
-              <a:t>ev-s-20260705-0376-29［news］https://hn.algolia.com/api/v1/search_by_date?query=DeepSeek&amp;tags=story&amp;hitsPerPage=30&amp;numericFilters=created_at_i%3E%3D1733011200%2Ccreated_at_i%3C%3D1743465599（2026-07-05T07:51:43+00:00）</a:t>
-            </a:r>
-          </a:p>
-          <a:p>
-            <a:pPr algn="l">
+              <a:t>ev-s-20260705-0376-29［news］</a:t>
+            </a:r>
+            <a:r>
+              <a:rPr sz="1050" b="0">
+                <a:solidFill>
+                  <a:srgbClr val="2A63E8"/>
+                </a:solidFill>
+                <a:latin typeface="Helvetica Neue"/>
+                <a:hlinkClick r:id="rId6"/>
+                <a:ea typeface="PingFang SC"/>
+              </a:rPr>
+              <a:t>https://hn.algolia.com/api/v1/search_by_date?query=DeepSeek&amp;tags=story&amp;hitsPerPage=30&amp;numericFilters=created_at_i%3E%3D1733011200%2Ccreated_at_i%3C%3D1743465599</a:t>
+            </a:r>
+            <a:r>
+              <a:rPr sz="1050" b="0">
+                <a:solidFill>
+                  <a:srgbClr val="5B6B81"/>
+                </a:solidFill>
+                <a:latin typeface="Helvetica Neue"/>
+                <a:ea typeface="PingFang SC"/>
+              </a:rPr>
+              <a:t>（2026-07-05T07:51:43+00:00）</a:t>
+            </a:r>
+          </a:p>
+          <a:p>
+            <a:pPr>
               <a:lnSpc>
                 <a:spcPct val="110000"/>
               </a:lnSpc>
@@ -4284,11 +4892,32 @@
                 <a:latin typeface="Helvetica Neue"/>
                 <a:ea typeface="PingFang SC"/>
               </a:rPr>
-              <a:t>ev-s-20260705-0376-30［news］https://hn.algolia.com/api/v1/search_by_date?query=DeepSeek+V3&amp;tags=story&amp;hitsPerPage=20&amp;numericFilters=created_at_i%3E%3D1733011200%2Ccreated_at_i%3C%3D1736985599（2026-07-05T07:51:50+00:00）</a:t>
-            </a:r>
-          </a:p>
-          <a:p>
-            <a:pPr algn="l">
+              <a:t>ev-s-20260705-0376-30［news］</a:t>
+            </a:r>
+            <a:r>
+              <a:rPr sz="1050" b="0">
+                <a:solidFill>
+                  <a:srgbClr val="2A63E8"/>
+                </a:solidFill>
+                <a:latin typeface="Helvetica Neue"/>
+                <a:hlinkClick r:id="rId7"/>
+                <a:ea typeface="PingFang SC"/>
+              </a:rPr>
+              <a:t>https://hn.algolia.com/api/v1/search_by_date?query=DeepSeek+V3&amp;tags=story&amp;hitsPerPage=20&amp;numericFilters=created_at_i%3E%3D1733011200%2Ccreated_at_i%3C%3D1736985599</a:t>
+            </a:r>
+            <a:r>
+              <a:rPr sz="1050" b="0">
+                <a:solidFill>
+                  <a:srgbClr val="5B6B81"/>
+                </a:solidFill>
+                <a:latin typeface="Helvetica Neue"/>
+                <a:ea typeface="PingFang SC"/>
+              </a:rPr>
+              <a:t>（2026-07-05T07:51:50+00:00）</a:t>
+            </a:r>
+          </a:p>
+          <a:p>
+            <a:pPr>
               <a:lnSpc>
                 <a:spcPct val="110000"/>
               </a:lnSpc>
@@ -4304,11 +4933,32 @@
                 <a:latin typeface="Helvetica Neue"/>
                 <a:ea typeface="PingFang SC"/>
               </a:rPr>
-              <a:t>ev-s-20260705-0376-31［news］https://hn.algolia.com/api/v1/search_by_date?query=GTC&amp;tags=story&amp;hitsPerPage=30&amp;numericFilters=created_at_i%3E%3D1709251200%2Ccreated_at_i%3C%3D1713225599（2026-07-05T07:51:50+00:00）</a:t>
-            </a:r>
-          </a:p>
-          <a:p>
-            <a:pPr algn="l">
+              <a:t>ev-s-20260705-0376-31［news］</a:t>
+            </a:r>
+            <a:r>
+              <a:rPr sz="1050" b="0">
+                <a:solidFill>
+                  <a:srgbClr val="2A63E8"/>
+                </a:solidFill>
+                <a:latin typeface="Helvetica Neue"/>
+                <a:hlinkClick r:id="rId8"/>
+                <a:ea typeface="PingFang SC"/>
+              </a:rPr>
+              <a:t>https://hn.algolia.com/api/v1/search_by_date?query=GTC&amp;tags=story&amp;hitsPerPage=30&amp;numericFilters=created_at_i%3E%3D1709251200%2Ccreated_at_i%3C%3D1713225599</a:t>
+            </a:r>
+            <a:r>
+              <a:rPr sz="1050" b="0">
+                <a:solidFill>
+                  <a:srgbClr val="5B6B81"/>
+                </a:solidFill>
+                <a:latin typeface="Helvetica Neue"/>
+                <a:ea typeface="PingFang SC"/>
+              </a:rPr>
+              <a:t>（2026-07-05T07:51:50+00:00）</a:t>
+            </a:r>
+          </a:p>
+          <a:p>
+            <a:pPr>
               <a:lnSpc>
                 <a:spcPct val="110000"/>
               </a:lnSpc>
@@ -4324,11 +4974,32 @@
                 <a:latin typeface="Helvetica Neue"/>
                 <a:ea typeface="PingFang SC"/>
               </a:rPr>
-              <a:t>ev-s-20260705-0376-32［news］https://hn.algolia.com/api/v1/search_by_date?query=RTX&amp;tags=story&amp;hitsPerPage=30&amp;numericFilters=created_at_i%3E%3D1625097600%2Ccreated_at_i%3C%3D1635724799（2026-07-05T07:51:50+00:00）</a:t>
-            </a:r>
-          </a:p>
-          <a:p>
-            <a:pPr algn="l">
+              <a:t>ev-s-20260705-0376-32［news］</a:t>
+            </a:r>
+            <a:r>
+              <a:rPr sz="1050" b="0">
+                <a:solidFill>
+                  <a:srgbClr val="2A63E8"/>
+                </a:solidFill>
+                <a:latin typeface="Helvetica Neue"/>
+                <a:hlinkClick r:id="rId9"/>
+                <a:ea typeface="PingFang SC"/>
+              </a:rPr>
+              <a:t>https://hn.algolia.com/api/v1/search_by_date?query=RTX&amp;tags=story&amp;hitsPerPage=30&amp;numericFilters=created_at_i%3E%3D1625097600%2Ccreated_at_i%3C%3D1635724799</a:t>
+            </a:r>
+            <a:r>
+              <a:rPr sz="1050" b="0">
+                <a:solidFill>
+                  <a:srgbClr val="5B6B81"/>
+                </a:solidFill>
+                <a:latin typeface="Helvetica Neue"/>
+                <a:ea typeface="PingFang SC"/>
+              </a:rPr>
+              <a:t>（2026-07-05T07:51:50+00:00）</a:t>
+            </a:r>
+          </a:p>
+          <a:p>
+            <a:pPr>
               <a:lnSpc>
                 <a:spcPct val="110000"/>
               </a:lnSpc>
@@ -4344,11 +5015,32 @@
                 <a:latin typeface="Helvetica Neue"/>
                 <a:ea typeface="PingFang SC"/>
               </a:rPr>
-              <a:t>ev-s-20260705-0376-33［news］https://hn.algolia.com/api/v1/search_by_date?query=DeepSeek+R1&amp;tags=story&amp;hitsPerPage=20&amp;numericFilters=created_at_i%3E%3D1737331200%2Ccreated_at_i%3C%3D1739231999（2026-07-05T07:51:50+00:00）</a:t>
-            </a:r>
-          </a:p>
-          <a:p>
-            <a:pPr algn="l">
+              <a:t>ev-s-20260705-0376-33［news］</a:t>
+            </a:r>
+            <a:r>
+              <a:rPr sz="1050" b="0">
+                <a:solidFill>
+                  <a:srgbClr val="2A63E8"/>
+                </a:solidFill>
+                <a:latin typeface="Helvetica Neue"/>
+                <a:hlinkClick r:id="rId10"/>
+                <a:ea typeface="PingFang SC"/>
+              </a:rPr>
+              <a:t>https://hn.algolia.com/api/v1/search_by_date?query=DeepSeek+R1&amp;tags=story&amp;hitsPerPage=20&amp;numericFilters=created_at_i%3E%3D1737331200%2Ccreated_at_i%3C%3D1739231999</a:t>
+            </a:r>
+            <a:r>
+              <a:rPr sz="1050" b="0">
+                <a:solidFill>
+                  <a:srgbClr val="5B6B81"/>
+                </a:solidFill>
+                <a:latin typeface="Helvetica Neue"/>
+                <a:ea typeface="PingFang SC"/>
+              </a:rPr>
+              <a:t>（2026-07-05T07:51:50+00:00）</a:t>
+            </a:r>
+          </a:p>
+          <a:p>
+            <a:pPr>
               <a:lnSpc>
                 <a:spcPct val="110000"/>
               </a:lnSpc>
@@ -4364,11 +5056,32 @@
                 <a:latin typeface="Helvetica Neue"/>
                 <a:ea typeface="PingFang SC"/>
               </a:rPr>
-              <a:t>ev-s-20260705-0376-34［news］https://hn.algolia.com/api/v1/search_by_date?query=crypto&amp;tags=story&amp;hitsPerPage=20&amp;numericFilters=created_at_i%3E%3D1625097600%2Ccreated_at_i%3C%3D1635724799（2026-07-05T07:51:57+00:00）</a:t>
-            </a:r>
-          </a:p>
-          <a:p>
-            <a:pPr algn="l">
+              <a:t>ev-s-20260705-0376-34［news］</a:t>
+            </a:r>
+            <a:r>
+              <a:rPr sz="1050" b="0">
+                <a:solidFill>
+                  <a:srgbClr val="2A63E8"/>
+                </a:solidFill>
+                <a:latin typeface="Helvetica Neue"/>
+                <a:hlinkClick r:id="rId11"/>
+                <a:ea typeface="PingFang SC"/>
+              </a:rPr>
+              <a:t>https://hn.algolia.com/api/v1/search_by_date?query=crypto&amp;tags=story&amp;hitsPerPage=20&amp;numericFilters=created_at_i%3E%3D1625097600%2Ccreated_at_i%3C%3D1635724799</a:t>
+            </a:r>
+            <a:r>
+              <a:rPr sz="1050" b="0">
+                <a:solidFill>
+                  <a:srgbClr val="5B6B81"/>
+                </a:solidFill>
+                <a:latin typeface="Helvetica Neue"/>
+                <a:ea typeface="PingFang SC"/>
+              </a:rPr>
+              <a:t>（2026-07-05T07:51:57+00:00）</a:t>
+            </a:r>
+          </a:p>
+          <a:p>
+            <a:pPr>
               <a:lnSpc>
                 <a:spcPct val="110000"/>
               </a:lnSpc>
@@ -4384,11 +5097,32 @@
                 <a:latin typeface="Helvetica Neue"/>
                 <a:ea typeface="PingFang SC"/>
               </a:rPr>
-              <a:t>ev-s-20260705-0376-35［news］https://hn.algolia.com/api/v1/search_by_date?query=Nvidia&amp;tags=story&amp;hitsPerPage=30&amp;numericFilters=created_at_i%3E%3D1710460800%2Ccreated_at_i%3C%3D1711929599（2026-07-05T07:51:57+00:00）</a:t>
-            </a:r>
-          </a:p>
-          <a:p>
-            <a:pPr algn="l">
+              <a:t>ev-s-20260705-0376-35［news］</a:t>
+            </a:r>
+            <a:r>
+              <a:rPr sz="1050" b="0">
+                <a:solidFill>
+                  <a:srgbClr val="2A63E8"/>
+                </a:solidFill>
+                <a:latin typeface="Helvetica Neue"/>
+                <a:hlinkClick r:id="rId12"/>
+                <a:ea typeface="PingFang SC"/>
+              </a:rPr>
+              <a:t>https://hn.algolia.com/api/v1/search_by_date?query=Nvidia&amp;tags=story&amp;hitsPerPage=30&amp;numericFilters=created_at_i%3E%3D1710460800%2Ccreated_at_i%3C%3D1711929599</a:t>
+            </a:r>
+            <a:r>
+              <a:rPr sz="1050" b="0">
+                <a:solidFill>
+                  <a:srgbClr val="5B6B81"/>
+                </a:solidFill>
+                <a:latin typeface="Helvetica Neue"/>
+                <a:ea typeface="PingFang SC"/>
+              </a:rPr>
+              <a:t>（2026-07-05T07:51:57+00:00）</a:t>
+            </a:r>
+          </a:p>
+          <a:p>
+            <a:pPr>
               <a:lnSpc>
                 <a:spcPct val="110000"/>
               </a:lnSpc>
@@ -4404,7 +5138,28 @@
                 <a:latin typeface="Helvetica Neue"/>
                 <a:ea typeface="PingFang SC"/>
               </a:rPr>
-              <a:t>ev-s-20260705-0376-36［news］https://hn.algolia.com/api/v1/search_by_date?query=GTC&amp;tags=story&amp;hitsPerPage=30&amp;numericFilters=created_at_i%3E%3D1741996800%2Ccreated_at_i%3C%3D1743465599（2026-07-05T07:51:57+00:00）</a:t>
+              <a:t>ev-s-20260705-0376-36［news］</a:t>
+            </a:r>
+            <a:r>
+              <a:rPr sz="1050" b="0">
+                <a:solidFill>
+                  <a:srgbClr val="2A63E8"/>
+                </a:solidFill>
+                <a:latin typeface="Helvetica Neue"/>
+                <a:hlinkClick r:id="rId13"/>
+                <a:ea typeface="PingFang SC"/>
+              </a:rPr>
+              <a:t>https://hn.algolia.com/api/v1/search_by_date?query=GTC&amp;tags=story&amp;hitsPerPage=30&amp;numericFilters=created_at_i%3E%3D1741996800%2Ccreated_at_i%3C%3D1743465599</a:t>
+            </a:r>
+            <a:r>
+              <a:rPr sz="1050" b="0">
+                <a:solidFill>
+                  <a:srgbClr val="5B6B81"/>
+                </a:solidFill>
+                <a:latin typeface="Helvetica Neue"/>
+                <a:ea typeface="PingFang SC"/>
+              </a:rPr>
+              <a:t>（2026-07-05T07:51:57+00:00）</a:t>
             </a:r>
           </a:p>
         </p:txBody>
@@ -4565,7 +5320,7 @@
           </a:bodyPr>
           <a:lstStyle/>
           <a:p>
-            <a:pPr algn="l">
+            <a:pPr>
               <a:lnSpc>
                 <a:spcPct val="110000"/>
               </a:lnSpc>
@@ -4581,11 +5336,32 @@
                 <a:latin typeface="Helvetica Neue"/>
                 <a:ea typeface="PingFang SC"/>
               </a:rPr>
-              <a:t>ev-s-20260705-0376-37［news］https://hn.algolia.com/api/v1/search_by_date?query=DeepSeek&amp;tags=story&amp;hitsPerPage=30&amp;numericFilters=created_at_i%3E%3D1736899200%2Ccreated_at_i%3C%3D1738367999（2026-07-05T07:51:57+00:00）</a:t>
-            </a:r>
-          </a:p>
-          <a:p>
-            <a:pPr algn="l">
+              <a:t>ev-s-20260705-0376-37［news］</a:t>
+            </a:r>
+            <a:r>
+              <a:rPr sz="1050" b="0">
+                <a:solidFill>
+                  <a:srgbClr val="2A63E8"/>
+                </a:solidFill>
+                <a:latin typeface="Helvetica Neue"/>
+                <a:hlinkClick r:id="rId2"/>
+                <a:ea typeface="PingFang SC"/>
+              </a:rPr>
+              <a:t>https://hn.algolia.com/api/v1/search_by_date?query=DeepSeek&amp;tags=story&amp;hitsPerPage=30&amp;numericFilters=created_at_i%3E%3D1736899200%2Ccreated_at_i%3C%3D1738367999</a:t>
+            </a:r>
+            <a:r>
+              <a:rPr sz="1050" b="0">
+                <a:solidFill>
+                  <a:srgbClr val="5B6B81"/>
+                </a:solidFill>
+                <a:latin typeface="Helvetica Neue"/>
+                <a:ea typeface="PingFang SC"/>
+              </a:rPr>
+              <a:t>（2026-07-05T07:51:57+00:00）</a:t>
+            </a:r>
+          </a:p>
+          <a:p>
+            <a:pPr>
               <a:lnSpc>
                 <a:spcPct val="110000"/>
               </a:lnSpc>
@@ -4601,11 +5377,32 @@
                 <a:latin typeface="Helvetica Neue"/>
                 <a:ea typeface="PingFang SC"/>
               </a:rPr>
-              <a:t>ev-s-20260705-0376-38［news］https://hn.algolia.com/api/v1/search_by_date?query=Nvidia+GTC&amp;tags=story&amp;hitsPerPage=20&amp;numericFilters=created_at_i%3E%3D1742169600%2Ccreated_at_i%3C%3D1742687999（2026-07-05T07:52:06+00:00）</a:t>
-            </a:r>
-          </a:p>
-          <a:p>
-            <a:pPr algn="l">
+              <a:t>ev-s-20260705-0376-38［news］</a:t>
+            </a:r>
+            <a:r>
+              <a:rPr sz="1050" b="0">
+                <a:solidFill>
+                  <a:srgbClr val="2A63E8"/>
+                </a:solidFill>
+                <a:latin typeface="Helvetica Neue"/>
+                <a:hlinkClick r:id="rId3"/>
+                <a:ea typeface="PingFang SC"/>
+              </a:rPr>
+              <a:t>https://hn.algolia.com/api/v1/search_by_date?query=Nvidia+GTC&amp;tags=story&amp;hitsPerPage=20&amp;numericFilters=created_at_i%3E%3D1742169600%2Ccreated_at_i%3C%3D1742687999</a:t>
+            </a:r>
+            <a:r>
+              <a:rPr sz="1050" b="0">
+                <a:solidFill>
+                  <a:srgbClr val="5B6B81"/>
+                </a:solidFill>
+                <a:latin typeface="Helvetica Neue"/>
+                <a:ea typeface="PingFang SC"/>
+              </a:rPr>
+              <a:t>（2026-07-05T07:52:06+00:00）</a:t>
+            </a:r>
+          </a:p>
+          <a:p>
+            <a:pPr>
               <a:lnSpc>
                 <a:spcPct val="110000"/>
               </a:lnSpc>
@@ -4621,11 +5418,32 @@
                 <a:latin typeface="Helvetica Neue"/>
                 <a:ea typeface="PingFang SC"/>
               </a:rPr>
-              <a:t>ev-s-20260705-0376-39［news］https://hn.algolia.com/api/v1/search_by_date?query=Blackwell&amp;tags=story&amp;hitsPerPage=20&amp;numericFilters=created_at_i%3E%3D1710720000%2Ccreated_at_i%3C%3D1711151999（2026-07-05T07:52:06+00:00）</a:t>
-            </a:r>
-          </a:p>
-          <a:p>
-            <a:pPr algn="l">
+              <a:t>ev-s-20260705-0376-39［news］</a:t>
+            </a:r>
+            <a:r>
+              <a:rPr sz="1050" b="0">
+                <a:solidFill>
+                  <a:srgbClr val="2A63E8"/>
+                </a:solidFill>
+                <a:latin typeface="Helvetica Neue"/>
+                <a:hlinkClick r:id="rId4"/>
+                <a:ea typeface="PingFang SC"/>
+              </a:rPr>
+              <a:t>https://hn.algolia.com/api/v1/search_by_date?query=Blackwell&amp;tags=story&amp;hitsPerPage=20&amp;numericFilters=created_at_i%3E%3D1710720000%2Ccreated_at_i%3C%3D1711151999</a:t>
+            </a:r>
+            <a:r>
+              <a:rPr sz="1050" b="0">
+                <a:solidFill>
+                  <a:srgbClr val="5B6B81"/>
+                </a:solidFill>
+                <a:latin typeface="Helvetica Neue"/>
+                <a:ea typeface="PingFang SC"/>
+              </a:rPr>
+              <a:t>（2026-07-05T07:52:06+00:00）</a:t>
+            </a:r>
+          </a:p>
+          <a:p>
+            <a:pPr>
               <a:lnSpc>
                 <a:spcPct val="110000"/>
               </a:lnSpc>
@@ -4641,11 +5459,32 @@
                 <a:latin typeface="Helvetica Neue"/>
                 <a:ea typeface="PingFang SC"/>
               </a:rPr>
-              <a:t>ev-s-20260705-0376-40［news］https://hn.algolia.com/api/v1/search_by_date?query=DeepSeek+R1+release&amp;tags=story&amp;hitsPerPage=15&amp;numericFilters=created_at_i%3E%3D1737331200%2Ccreated_at_i%3C%3D1738108799（2026-07-05T07:52:07+00:00）</a:t>
-            </a:r>
-          </a:p>
-          <a:p>
-            <a:pPr algn="l">
+              <a:t>ev-s-20260705-0376-40［news］</a:t>
+            </a:r>
+            <a:r>
+              <a:rPr sz="1050" b="0">
+                <a:solidFill>
+                  <a:srgbClr val="2A63E8"/>
+                </a:solidFill>
+                <a:latin typeface="Helvetica Neue"/>
+                <a:hlinkClick r:id="rId5"/>
+                <a:ea typeface="PingFang SC"/>
+              </a:rPr>
+              <a:t>https://hn.algolia.com/api/v1/search_by_date?query=DeepSeek+R1+release&amp;tags=story&amp;hitsPerPage=15&amp;numericFilters=created_at_i%3E%3D1737331200%2Ccreated_at_i%3C%3D1738108799</a:t>
+            </a:r>
+            <a:r>
+              <a:rPr sz="1050" b="0">
+                <a:solidFill>
+                  <a:srgbClr val="5B6B81"/>
+                </a:solidFill>
+                <a:latin typeface="Helvetica Neue"/>
+                <a:ea typeface="PingFang SC"/>
+              </a:rPr>
+              <a:t>（2026-07-05T07:52:07+00:00）</a:t>
+            </a:r>
+          </a:p>
+          <a:p>
+            <a:pPr>
               <a:lnSpc>
                 <a:spcPct val="110000"/>
               </a:lnSpc>
@@ -4661,11 +5500,32 @@
                 <a:latin typeface="Helvetica Neue"/>
                 <a:ea typeface="PingFang SC"/>
               </a:rPr>
-              <a:t>ev-s-20260705-0376-41［news］https://hn.algolia.com/api/v1/search_by_date?query=Nvidia&amp;tags=story&amp;hitsPerPage=30&amp;numericFilters=created_at_i%3E%3D1625097600%2Ccreated_at_i%3C%3D1635724799（2026-07-05T07:52:07+00:00）</a:t>
-            </a:r>
-          </a:p>
-          <a:p>
-            <a:pPr algn="l">
+              <a:t>ev-s-20260705-0376-41［news］</a:t>
+            </a:r>
+            <a:r>
+              <a:rPr sz="1050" b="0">
+                <a:solidFill>
+                  <a:srgbClr val="2A63E8"/>
+                </a:solidFill>
+                <a:latin typeface="Helvetica Neue"/>
+                <a:hlinkClick r:id="rId6"/>
+                <a:ea typeface="PingFang SC"/>
+              </a:rPr>
+              <a:t>https://hn.algolia.com/api/v1/search_by_date?query=Nvidia&amp;tags=story&amp;hitsPerPage=30&amp;numericFilters=created_at_i%3E%3D1625097600%2Ccreated_at_i%3C%3D1635724799</a:t>
+            </a:r>
+            <a:r>
+              <a:rPr sz="1050" b="0">
+                <a:solidFill>
+                  <a:srgbClr val="5B6B81"/>
+                </a:solidFill>
+                <a:latin typeface="Helvetica Neue"/>
+                <a:ea typeface="PingFang SC"/>
+              </a:rPr>
+              <a:t>（2026-07-05T07:52:07+00:00）</a:t>
+            </a:r>
+          </a:p>
+          <a:p>
+            <a:pPr>
               <a:lnSpc>
                 <a:spcPct val="110000"/>
               </a:lnSpc>
@@ -4681,11 +5541,32 @@
                 <a:latin typeface="Helvetica Neue"/>
                 <a:ea typeface="PingFang SC"/>
               </a:rPr>
-              <a:t>ev-s-20260705-0376-42［news］https://hn.algolia.com/api/v1/search_by_date?query=GPU+shortage&amp;tags=story&amp;hitsPerPage=20&amp;numericFilters=created_at_i%3E%3D1625097600%2Ccreated_at_i%3C%3D1635724799（2026-07-05T07:52:15+00:00）</a:t>
-            </a:r>
-          </a:p>
-          <a:p>
-            <a:pPr algn="l">
+              <a:t>ev-s-20260705-0376-42［news］</a:t>
+            </a:r>
+            <a:r>
+              <a:rPr sz="1050" b="0">
+                <a:solidFill>
+                  <a:srgbClr val="2A63E8"/>
+                </a:solidFill>
+                <a:latin typeface="Helvetica Neue"/>
+                <a:hlinkClick r:id="rId7"/>
+                <a:ea typeface="PingFang SC"/>
+              </a:rPr>
+              <a:t>https://hn.algolia.com/api/v1/search_by_date?query=GPU+shortage&amp;tags=story&amp;hitsPerPage=20&amp;numericFilters=created_at_i%3E%3D1625097600%2Ccreated_at_i%3C%3D1635724799</a:t>
+            </a:r>
+            <a:r>
+              <a:rPr sz="1050" b="0">
+                <a:solidFill>
+                  <a:srgbClr val="5B6B81"/>
+                </a:solidFill>
+                <a:latin typeface="Helvetica Neue"/>
+                <a:ea typeface="PingFang SC"/>
+              </a:rPr>
+              <a:t>（2026-07-05T07:52:15+00:00）</a:t>
+            </a:r>
+          </a:p>
+          <a:p>
+            <a:pPr>
               <a:lnSpc>
                 <a:spcPct val="110000"/>
               </a:lnSpc>
@@ -4701,11 +5582,32 @@
                 <a:latin typeface="Helvetica Neue"/>
                 <a:ea typeface="PingFang SC"/>
               </a:rPr>
-              <a:t>ev-s-20260705-0376-43［news］https://hn.algolia.com/api/v1/search_by_date?query=H200&amp;tags=story&amp;hitsPerPage=20&amp;numericFilters=created_at_i%3E%3D1714521600%2Ccreated_at_i%3C%3D1725148799（2026-07-05T07:52:16+00:00）</a:t>
-            </a:r>
-          </a:p>
-          <a:p>
-            <a:pPr algn="l">
+              <a:t>ev-s-20260705-0376-43［news］</a:t>
+            </a:r>
+            <a:r>
+              <a:rPr sz="1050" b="0">
+                <a:solidFill>
+                  <a:srgbClr val="2A63E8"/>
+                </a:solidFill>
+                <a:latin typeface="Helvetica Neue"/>
+                <a:hlinkClick r:id="rId8"/>
+                <a:ea typeface="PingFang SC"/>
+              </a:rPr>
+              <a:t>https://hn.algolia.com/api/v1/search_by_date?query=H200&amp;tags=story&amp;hitsPerPage=20&amp;numericFilters=created_at_i%3E%3D1714521600%2Ccreated_at_i%3C%3D1725148799</a:t>
+            </a:r>
+            <a:r>
+              <a:rPr sz="1050" b="0">
+                <a:solidFill>
+                  <a:srgbClr val="5B6B81"/>
+                </a:solidFill>
+                <a:latin typeface="Helvetica Neue"/>
+                <a:ea typeface="PingFang SC"/>
+              </a:rPr>
+              <a:t>（2026-07-05T07:52:16+00:00）</a:t>
+            </a:r>
+          </a:p>
+          <a:p>
+            <a:pPr>
               <a:lnSpc>
                 <a:spcPct val="110000"/>
               </a:lnSpc>
@@ -4721,11 +5623,32 @@
                 <a:latin typeface="Helvetica Neue"/>
                 <a:ea typeface="PingFang SC"/>
               </a:rPr>
-              <a:t>ev-s-20260705-0376-44［news］https://hn.algolia.com/api/v1/search_by_date?query=Rubin&amp;tags=story&amp;hitsPerPage=20&amp;numericFilters=created_at_i%3E%3D1714521600%2Ccreated_at_i%3C%3D1751327999（2026-07-05T07:52:16+00:00）</a:t>
-            </a:r>
-          </a:p>
-          <a:p>
-            <a:pPr algn="l">
+              <a:t>ev-s-20260705-0376-44［news］</a:t>
+            </a:r>
+            <a:r>
+              <a:rPr sz="1050" b="0">
+                <a:solidFill>
+                  <a:srgbClr val="2A63E8"/>
+                </a:solidFill>
+                <a:latin typeface="Helvetica Neue"/>
+                <a:hlinkClick r:id="rId9"/>
+                <a:ea typeface="PingFang SC"/>
+              </a:rPr>
+              <a:t>https://hn.algolia.com/api/v1/search_by_date?query=Rubin&amp;tags=story&amp;hitsPerPage=20&amp;numericFilters=created_at_i%3E%3D1714521600%2Ccreated_at_i%3C%3D1751327999</a:t>
+            </a:r>
+            <a:r>
+              <a:rPr sz="1050" b="0">
+                <a:solidFill>
+                  <a:srgbClr val="5B6B81"/>
+                </a:solidFill>
+                <a:latin typeface="Helvetica Neue"/>
+                <a:ea typeface="PingFang SC"/>
+              </a:rPr>
+              <a:t>（2026-07-05T07:52:16+00:00）</a:t>
+            </a:r>
+          </a:p>
+          <a:p>
+            <a:pPr>
               <a:lnSpc>
                 <a:spcPct val="110000"/>
               </a:lnSpc>
@@ -4741,11 +5664,32 @@
                 <a:latin typeface="Helvetica Neue"/>
                 <a:ea typeface="PingFang SC"/>
               </a:rPr>
-              <a:t>ev-s-20260705-0376-45［news］https://hn.algolia.com/api/v1/search_by_date?query=export+control&amp;tags=story&amp;hitsPerPage=20&amp;numericFilters=created_at_i%3E%3D1714521600%2Ccreated_at_i%3C%3D1767225599（2026-07-05T07:52:16+00:00）</a:t>
-            </a:r>
-          </a:p>
-          <a:p>
-            <a:pPr algn="l">
+              <a:t>ev-s-20260705-0376-45［news］</a:t>
+            </a:r>
+            <a:r>
+              <a:rPr sz="1050" b="0">
+                <a:solidFill>
+                  <a:srgbClr val="2A63E8"/>
+                </a:solidFill>
+                <a:latin typeface="Helvetica Neue"/>
+                <a:hlinkClick r:id="rId10"/>
+                <a:ea typeface="PingFang SC"/>
+              </a:rPr>
+              <a:t>https://hn.algolia.com/api/v1/search_by_date?query=export+control&amp;tags=story&amp;hitsPerPage=20&amp;numericFilters=created_at_i%3E%3D1714521600%2Ccreated_at_i%3C%3D1767225599</a:t>
+            </a:r>
+            <a:r>
+              <a:rPr sz="1050" b="0">
+                <a:solidFill>
+                  <a:srgbClr val="5B6B81"/>
+                </a:solidFill>
+                <a:latin typeface="Helvetica Neue"/>
+                <a:ea typeface="PingFang SC"/>
+              </a:rPr>
+              <a:t>（2026-07-05T07:52:16+00:00）</a:t>
+            </a:r>
+          </a:p>
+          <a:p>
+            <a:pPr>
               <a:lnSpc>
                 <a:spcPct val="110000"/>
               </a:lnSpc>
@@ -4761,11 +5705,32 @@
                 <a:latin typeface="Helvetica Neue"/>
                 <a:ea typeface="PingFang SC"/>
               </a:rPr>
-              <a:t>ev-s-20260705-0376-46［news］https://hn.algolia.com/api/v1/search_by_date?query=Nvidia+stock+split&amp;tags=story&amp;hitsPerPage=20&amp;numericFilters=created_at_i%3E%3D1714521600%2Ccreated_at_i%3C%3D1722470399（2026-07-05T07:52:24+00:00）</a:t>
-            </a:r>
-          </a:p>
-          <a:p>
-            <a:pPr algn="l">
+              <a:t>ev-s-20260705-0376-46［news］</a:t>
+            </a:r>
+            <a:r>
+              <a:rPr sz="1050" b="0">
+                <a:solidFill>
+                  <a:srgbClr val="2A63E8"/>
+                </a:solidFill>
+                <a:latin typeface="Helvetica Neue"/>
+                <a:hlinkClick r:id="rId11"/>
+                <a:ea typeface="PingFang SC"/>
+              </a:rPr>
+              <a:t>https://hn.algolia.com/api/v1/search_by_date?query=Nvidia+stock+split&amp;tags=story&amp;hitsPerPage=20&amp;numericFilters=created_at_i%3E%3D1714521600%2Ccreated_at_i%3C%3D1722470399</a:t>
+            </a:r>
+            <a:r>
+              <a:rPr sz="1050" b="0">
+                <a:solidFill>
+                  <a:srgbClr val="5B6B81"/>
+                </a:solidFill>
+                <a:latin typeface="Helvetica Neue"/>
+                <a:ea typeface="PingFang SC"/>
+              </a:rPr>
+              <a:t>（2026-07-05T07:52:24+00:00）</a:t>
+            </a:r>
+          </a:p>
+          <a:p>
+            <a:pPr>
               <a:lnSpc>
                 <a:spcPct val="110000"/>
               </a:lnSpc>
@@ -4781,11 +5746,32 @@
                 <a:latin typeface="Helvetica Neue"/>
                 <a:ea typeface="PingFang SC"/>
               </a:rPr>
-              <a:t>ev-s-20260705-0376-47［news］https://hn.algolia.com/api/v1/search_by_date?query=Nvidia+earnings&amp;tags=story&amp;hitsPerPage=20&amp;numericFilters=created_at_i%3E%3D1714521600%2Ccreated_at_i%3C%3D1735689599（2026-07-05T07:52:24+00:00）</a:t>
-            </a:r>
-          </a:p>
-          <a:p>
-            <a:pPr algn="l">
+              <a:t>ev-s-20260705-0376-47［news］</a:t>
+            </a:r>
+            <a:r>
+              <a:rPr sz="1050" b="0">
+                <a:solidFill>
+                  <a:srgbClr val="2A63E8"/>
+                </a:solidFill>
+                <a:latin typeface="Helvetica Neue"/>
+                <a:hlinkClick r:id="rId12"/>
+                <a:ea typeface="PingFang SC"/>
+              </a:rPr>
+              <a:t>https://hn.algolia.com/api/v1/search_by_date?query=Nvidia+earnings&amp;tags=story&amp;hitsPerPage=20&amp;numericFilters=created_at_i%3E%3D1714521600%2Ccreated_at_i%3C%3D1735689599</a:t>
+            </a:r>
+            <a:r>
+              <a:rPr sz="1050" b="0">
+                <a:solidFill>
+                  <a:srgbClr val="5B6B81"/>
+                </a:solidFill>
+                <a:latin typeface="Helvetica Neue"/>
+                <a:ea typeface="PingFang SC"/>
+              </a:rPr>
+              <a:t>（2026-07-05T07:52:24+00:00）</a:t>
+            </a:r>
+          </a:p>
+          <a:p>
+            <a:pPr>
               <a:lnSpc>
                 <a:spcPct val="110000"/>
               </a:lnSpc>
@@ -4801,7 +5787,28 @@
                 <a:latin typeface="Helvetica Neue"/>
                 <a:ea typeface="PingFang SC"/>
               </a:rPr>
-              <a:t>ev-s-20260705-0376-48［news］https://hn.algolia.com/api/v1/search_by_date?query=chip+ban&amp;tags=story&amp;hitsPerPage=20&amp;numericFilters=created_at_i%3E%3D1714521600%2Ccreated_at_i%3C%3D1751327999（2026-07-05T07:52:25+00:00）</a:t>
+              <a:t>ev-s-20260705-0376-48［news］</a:t>
+            </a:r>
+            <a:r>
+              <a:rPr sz="1050" b="0">
+                <a:solidFill>
+                  <a:srgbClr val="2A63E8"/>
+                </a:solidFill>
+                <a:latin typeface="Helvetica Neue"/>
+                <a:hlinkClick r:id="rId13"/>
+                <a:ea typeface="PingFang SC"/>
+              </a:rPr>
+              <a:t>https://hn.algolia.com/api/v1/search_by_date?query=chip+ban&amp;tags=story&amp;hitsPerPage=20&amp;numericFilters=created_at_i%3E%3D1714521600%2Ccreated_at_i%3C%3D1751327999</a:t>
+            </a:r>
+            <a:r>
+              <a:rPr sz="1050" b="0">
+                <a:solidFill>
+                  <a:srgbClr val="5B6B81"/>
+                </a:solidFill>
+                <a:latin typeface="Helvetica Neue"/>
+                <a:ea typeface="PingFang SC"/>
+              </a:rPr>
+              <a:t>（2026-07-05T07:52:25+00:00）</a:t>
             </a:r>
           </a:p>
         </p:txBody>
@@ -4962,7 +5969,7 @@
           </a:bodyPr>
           <a:lstStyle/>
           <a:p>
-            <a:pPr algn="l">
+            <a:pPr>
               <a:lnSpc>
                 <a:spcPct val="110000"/>
               </a:lnSpc>
@@ -4978,11 +5985,32 @@
                 <a:latin typeface="Helvetica Neue"/>
                 <a:ea typeface="PingFang SC"/>
               </a:rPr>
-              <a:t>ev-s-20260705-0376-49［news］https://hn.algolia.com/api/v1/search_by_date?query=Nvidia+H200&amp;tags=story&amp;hitsPerPage=20&amp;numericFilters=created_at_i%3E%3D1685577600%2Ccreated_at_i%3C%3D1719791999（2026-07-05T07:52:25+00:00）</a:t>
-            </a:r>
-          </a:p>
-          <a:p>
-            <a:pPr algn="l">
+              <a:t>ev-s-20260705-0376-49［news］</a:t>
+            </a:r>
+            <a:r>
+              <a:rPr sz="1050" b="0">
+                <a:solidFill>
+                  <a:srgbClr val="2A63E8"/>
+                </a:solidFill>
+                <a:latin typeface="Helvetica Neue"/>
+                <a:hlinkClick r:id="rId2"/>
+                <a:ea typeface="PingFang SC"/>
+              </a:rPr>
+              <a:t>https://hn.algolia.com/api/v1/search_by_date?query=Nvidia+H200&amp;tags=story&amp;hitsPerPage=20&amp;numericFilters=created_at_i%3E%3D1685577600%2Ccreated_at_i%3C%3D1719791999</a:t>
+            </a:r>
+            <a:r>
+              <a:rPr sz="1050" b="0">
+                <a:solidFill>
+                  <a:srgbClr val="5B6B81"/>
+                </a:solidFill>
+                <a:latin typeface="Helvetica Neue"/>
+                <a:ea typeface="PingFang SC"/>
+              </a:rPr>
+              <a:t>（2026-07-05T07:52:25+00:00）</a:t>
+            </a:r>
+          </a:p>
+          <a:p>
+            <a:pPr>
               <a:lnSpc>
                 <a:spcPct val="110000"/>
               </a:lnSpc>
@@ -4998,11 +6026,32 @@
                 <a:latin typeface="Helvetica Neue"/>
                 <a:ea typeface="PingFang SC"/>
               </a:rPr>
-              <a:t>ev-s-20260705-0376-50［news］https://hn.algolia.com/api/v1/search_by_date?query=Nvidia+mining&amp;tags=story&amp;hitsPerPage=20&amp;numericFilters=created_at_i%3E%3D1625097600%2Ccreated_at_i%3C%3D1635724799（2026-07-05T07:52:33+00:00）</a:t>
-            </a:r>
-          </a:p>
-          <a:p>
-            <a:pPr algn="l">
+              <a:t>ev-s-20260705-0376-50［news］</a:t>
+            </a:r>
+            <a:r>
+              <a:rPr sz="1050" b="0">
+                <a:solidFill>
+                  <a:srgbClr val="2A63E8"/>
+                </a:solidFill>
+                <a:latin typeface="Helvetica Neue"/>
+                <a:hlinkClick r:id="rId3"/>
+                <a:ea typeface="PingFang SC"/>
+              </a:rPr>
+              <a:t>https://hn.algolia.com/api/v1/search_by_date?query=Nvidia+mining&amp;tags=story&amp;hitsPerPage=20&amp;numericFilters=created_at_i%3E%3D1625097600%2Ccreated_at_i%3C%3D1635724799</a:t>
+            </a:r>
+            <a:r>
+              <a:rPr sz="1050" b="0">
+                <a:solidFill>
+                  <a:srgbClr val="5B6B81"/>
+                </a:solidFill>
+                <a:latin typeface="Helvetica Neue"/>
+                <a:ea typeface="PingFang SC"/>
+              </a:rPr>
+              <a:t>（2026-07-05T07:52:33+00:00）</a:t>
+            </a:r>
+          </a:p>
+          <a:p>
+            <a:pPr>
               <a:lnSpc>
                 <a:spcPct val="110000"/>
               </a:lnSpc>
@@ -5018,11 +6067,32 @@
                 <a:latin typeface="Helvetica Neue"/>
                 <a:ea typeface="PingFang SC"/>
               </a:rPr>
-              <a:t>ev-s-20260705-0376-51［news］https://hn.algolia.com/api/v1/search_by_date?query=Vera+Rubin&amp;tags=story&amp;hitsPerPage=20&amp;numericFilters=created_at_i%3E%3D1740787200%2Ccreated_at_i%3C%3D1751327999（2026-07-05T07:52:33+00:00）</a:t>
-            </a:r>
-          </a:p>
-          <a:p>
-            <a:pPr algn="l">
+              <a:t>ev-s-20260705-0376-51［news］</a:t>
+            </a:r>
+            <a:r>
+              <a:rPr sz="1050" b="0">
+                <a:solidFill>
+                  <a:srgbClr val="2A63E8"/>
+                </a:solidFill>
+                <a:latin typeface="Helvetica Neue"/>
+                <a:hlinkClick r:id="rId4"/>
+                <a:ea typeface="PingFang SC"/>
+              </a:rPr>
+              <a:t>https://hn.algolia.com/api/v1/search_by_date?query=Vera+Rubin&amp;tags=story&amp;hitsPerPage=20&amp;numericFilters=created_at_i%3E%3D1740787200%2Ccreated_at_i%3C%3D1751327999</a:t>
+            </a:r>
+            <a:r>
+              <a:rPr sz="1050" b="0">
+                <a:solidFill>
+                  <a:srgbClr val="5B6B81"/>
+                </a:solidFill>
+                <a:latin typeface="Helvetica Neue"/>
+                <a:ea typeface="PingFang SC"/>
+              </a:rPr>
+              <a:t>（2026-07-05T07:52:33+00:00）</a:t>
+            </a:r>
+          </a:p>
+          <a:p>
+            <a:pPr>
               <a:lnSpc>
                 <a:spcPct val="110000"/>
               </a:lnSpc>
@@ -5038,11 +6108,32 @@
                 <a:latin typeface="Helvetica Neue"/>
                 <a:ea typeface="PingFang SC"/>
               </a:rPr>
-              <a:t>ev-s-20260705-0376-52［news］https://hn.algolia.com/api/v1/search_by_date?query=metaverse&amp;tags=story&amp;hitsPerPage=20&amp;numericFilters=created_at_i%3E%3D1625097600%2Ccreated_at_i%3C%3D1635724799（2026-07-05T07:52:33+00:00）</a:t>
-            </a:r>
-          </a:p>
-          <a:p>
-            <a:pPr algn="l">
+              <a:t>ev-s-20260705-0376-52［news］</a:t>
+            </a:r>
+            <a:r>
+              <a:rPr sz="1050" b="0">
+                <a:solidFill>
+                  <a:srgbClr val="2A63E8"/>
+                </a:solidFill>
+                <a:latin typeface="Helvetica Neue"/>
+                <a:hlinkClick r:id="rId5"/>
+                <a:ea typeface="PingFang SC"/>
+              </a:rPr>
+              <a:t>https://hn.algolia.com/api/v1/search_by_date?query=metaverse&amp;tags=story&amp;hitsPerPage=20&amp;numericFilters=created_at_i%3E%3D1625097600%2Ccreated_at_i%3C%3D1635724799</a:t>
+            </a:r>
+            <a:r>
+              <a:rPr sz="1050" b="0">
+                <a:solidFill>
+                  <a:srgbClr val="5B6B81"/>
+                </a:solidFill>
+                <a:latin typeface="Helvetica Neue"/>
+                <a:ea typeface="PingFang SC"/>
+              </a:rPr>
+              <a:t>（2026-07-05T07:52:33+00:00）</a:t>
+            </a:r>
+          </a:p>
+          <a:p>
+            <a:pPr>
               <a:lnSpc>
                 <a:spcPct val="110000"/>
               </a:lnSpc>
@@ -5058,11 +6149,32 @@
                 <a:latin typeface="Helvetica Neue"/>
                 <a:ea typeface="PingFang SC"/>
               </a:rPr>
-              <a:t>ev-s-20260705-0376-53［news］https://hn.algolia.com/api/v1/search_by_date?query=Omniverse&amp;tags=story&amp;hitsPerPage=20&amp;numericFilters=created_at_i%3E%3D1625097600%2Ccreated_at_i%3C%3D1635724799（2026-07-05T07:52:38+00:00）</a:t>
-            </a:r>
-          </a:p>
-          <a:p>
-            <a:pPr algn="l">
+              <a:t>ev-s-20260705-0376-53［news］</a:t>
+            </a:r>
+            <a:r>
+              <a:rPr sz="1050" b="0">
+                <a:solidFill>
+                  <a:srgbClr val="2A63E8"/>
+                </a:solidFill>
+                <a:latin typeface="Helvetica Neue"/>
+                <a:hlinkClick r:id="rId6"/>
+                <a:ea typeface="PingFang SC"/>
+              </a:rPr>
+              <a:t>https://hn.algolia.com/api/v1/search_by_date?query=Omniverse&amp;tags=story&amp;hitsPerPage=20&amp;numericFilters=created_at_i%3E%3D1625097600%2Ccreated_at_i%3C%3D1635724799</a:t>
+            </a:r>
+            <a:r>
+              <a:rPr sz="1050" b="0">
+                <a:solidFill>
+                  <a:srgbClr val="5B6B81"/>
+                </a:solidFill>
+                <a:latin typeface="Helvetica Neue"/>
+                <a:ea typeface="PingFang SC"/>
+              </a:rPr>
+              <a:t>（2026-07-05T07:52:38+00:00）</a:t>
+            </a:r>
+          </a:p>
+          <a:p>
+            <a:pPr>
               <a:lnSpc>
                 <a:spcPct val="110000"/>
               </a:lnSpc>
@@ -5078,11 +6190,32 @@
                 <a:latin typeface="Helvetica Neue"/>
                 <a:ea typeface="PingFang SC"/>
               </a:rPr>
-              <a:t>ev-s-20260705-0376-54［news］https://hn.algolia.com/api/v1/search_by_date?query=Nvidia+earnings+2025&amp;tags=story&amp;hitsPerPage=15&amp;numericFilters=created_at_i%3E%3D1735689600%2Ccreated_at_i%3C%3D1751327999（2026-07-05T07:52:45+00:00）</a:t>
-            </a:r>
-          </a:p>
-          <a:p>
-            <a:pPr algn="l">
+              <a:t>ev-s-20260705-0376-54［news］</a:t>
+            </a:r>
+            <a:r>
+              <a:rPr sz="1050" b="0">
+                <a:solidFill>
+                  <a:srgbClr val="2A63E8"/>
+                </a:solidFill>
+                <a:latin typeface="Helvetica Neue"/>
+                <a:hlinkClick r:id="rId7"/>
+                <a:ea typeface="PingFang SC"/>
+              </a:rPr>
+              <a:t>https://hn.algolia.com/api/v1/search_by_date?query=Nvidia+earnings+2025&amp;tags=story&amp;hitsPerPage=15&amp;numericFilters=created_at_i%3E%3D1735689600%2Ccreated_at_i%3C%3D1751327999</a:t>
+            </a:r>
+            <a:r>
+              <a:rPr sz="1050" b="0">
+                <a:solidFill>
+                  <a:srgbClr val="5B6B81"/>
+                </a:solidFill>
+                <a:latin typeface="Helvetica Neue"/>
+                <a:ea typeface="PingFang SC"/>
+              </a:rPr>
+              <a:t>（2026-07-05T07:52:45+00:00）</a:t>
+            </a:r>
+          </a:p>
+          <a:p>
+            <a:pPr>
               <a:lnSpc>
                 <a:spcPct val="110000"/>
               </a:lnSpc>
@@ -5098,11 +6231,32 @@
                 <a:latin typeface="Helvetica Neue"/>
                 <a:ea typeface="PingFang SC"/>
               </a:rPr>
-              <a:t>ev-s-20260705-0376-55［news］https://hn.algolia.com/api/v1/search_by_date?query=Nvidia+RTX+40&amp;tags=story&amp;hitsPerPage=15&amp;numericFilters=created_at_i%3E%3D1661990400%2Ccreated_at_i%3C%3D1669852799（2026-07-05T07:52:45+00:00）</a:t>
-            </a:r>
-          </a:p>
-          <a:p>
-            <a:pPr algn="l">
+              <a:t>ev-s-20260705-0376-55［news］</a:t>
+            </a:r>
+            <a:r>
+              <a:rPr sz="1050" b="0">
+                <a:solidFill>
+                  <a:srgbClr val="2A63E8"/>
+                </a:solidFill>
+                <a:latin typeface="Helvetica Neue"/>
+                <a:hlinkClick r:id="rId8"/>
+                <a:ea typeface="PingFang SC"/>
+              </a:rPr>
+              <a:t>https://hn.algolia.com/api/v1/search_by_date?query=Nvidia+RTX+40&amp;tags=story&amp;hitsPerPage=15&amp;numericFilters=created_at_i%3E%3D1661990400%2Ccreated_at_i%3C%3D1669852799</a:t>
+            </a:r>
+            <a:r>
+              <a:rPr sz="1050" b="0">
+                <a:solidFill>
+                  <a:srgbClr val="5B6B81"/>
+                </a:solidFill>
+                <a:latin typeface="Helvetica Neue"/>
+                <a:ea typeface="PingFang SC"/>
+              </a:rPr>
+              <a:t>（2026-07-05T07:52:45+00:00）</a:t>
+            </a:r>
+          </a:p>
+          <a:p>
+            <a:pPr>
               <a:lnSpc>
                 <a:spcPct val="110000"/>
               </a:lnSpc>
@@ -5118,11 +6272,32 @@
                 <a:latin typeface="Helvetica Neue"/>
                 <a:ea typeface="PingFang SC"/>
               </a:rPr>
-              <a:t>ev-s-20260705-0376-56［news］https://hn.algolia.com/api/v1/search_by_date?query=DeepSeek+R1+January&amp;tags=story&amp;hitsPerPage=20&amp;numericFilters=created_at_i%3E%3D1737158400%2Ccreated_at_i%3C%3D1738454399（2026-07-05T07:52:45+00:00）</a:t>
-            </a:r>
-          </a:p>
-          <a:p>
-            <a:pPr algn="l">
+              <a:t>ev-s-20260705-0376-56［news］</a:t>
+            </a:r>
+            <a:r>
+              <a:rPr sz="1050" b="0">
+                <a:solidFill>
+                  <a:srgbClr val="2A63E8"/>
+                </a:solidFill>
+                <a:latin typeface="Helvetica Neue"/>
+                <a:hlinkClick r:id="rId9"/>
+                <a:ea typeface="PingFang SC"/>
+              </a:rPr>
+              <a:t>https://hn.algolia.com/api/v1/search_by_date?query=DeepSeek+R1+January&amp;tags=story&amp;hitsPerPage=20&amp;numericFilters=created_at_i%3E%3D1737158400%2Ccreated_at_i%3C%3D1738454399</a:t>
+            </a:r>
+            <a:r>
+              <a:rPr sz="1050" b="0">
+                <a:solidFill>
+                  <a:srgbClr val="5B6B81"/>
+                </a:solidFill>
+                <a:latin typeface="Helvetica Neue"/>
+                <a:ea typeface="PingFang SC"/>
+              </a:rPr>
+              <a:t>（2026-07-05T07:52:45+00:00）</a:t>
+            </a:r>
+          </a:p>
+          <a:p>
+            <a:pPr>
               <a:lnSpc>
                 <a:spcPct val="110000"/>
               </a:lnSpc>
@@ -5138,11 +6313,32 @@
                 <a:latin typeface="Helvetica Neue"/>
                 <a:ea typeface="PingFang SC"/>
               </a:rPr>
-              <a:t>ev-s-20260705-0376-57［news］https://hn.algolia.com/api/v1/search_by_date?query=Nvidia+B20&amp;tags=story&amp;hitsPerPage=20&amp;numericFilters=created_at_i%3E%3D1704067200%2Ccreated_at_i%3C%3D1751327999（2026-07-05T07:52:46+00:00）</a:t>
-            </a:r>
-          </a:p>
-          <a:p>
-            <a:pPr algn="l">
+              <a:t>ev-s-20260705-0376-57［news］</a:t>
+            </a:r>
+            <a:r>
+              <a:rPr sz="1050" b="0">
+                <a:solidFill>
+                  <a:srgbClr val="2A63E8"/>
+                </a:solidFill>
+                <a:latin typeface="Helvetica Neue"/>
+                <a:hlinkClick r:id="rId10"/>
+                <a:ea typeface="PingFang SC"/>
+              </a:rPr>
+              <a:t>https://hn.algolia.com/api/v1/search_by_date?query=Nvidia+B20&amp;tags=story&amp;hitsPerPage=20&amp;numericFilters=created_at_i%3E%3D1704067200%2Ccreated_at_i%3C%3D1751327999</a:t>
+            </a:r>
+            <a:r>
+              <a:rPr sz="1050" b="0">
+                <a:solidFill>
+                  <a:srgbClr val="5B6B81"/>
+                </a:solidFill>
+                <a:latin typeface="Helvetica Neue"/>
+                <a:ea typeface="PingFang SC"/>
+              </a:rPr>
+              <a:t>（2026-07-05T07:52:46+00:00）</a:t>
+            </a:r>
+          </a:p>
+          <a:p>
+            <a:pPr>
               <a:lnSpc>
                 <a:spcPct val="110000"/>
               </a:lnSpc>
@@ -5158,11 +6354,32 @@
                 <a:latin typeface="Helvetica Neue"/>
                 <a:ea typeface="PingFang SC"/>
               </a:rPr>
-              <a:t>ev-s-20260705-0376-58［news］https://hn.algolia.com/api/v1/search_by_date?query=GB200+NVL72&amp;tags=story&amp;hitsPerPage=15&amp;numericFilters=created_at_i%3E%3D1709251200%2Ccreated_at_i%3C%3D1735689599（2026-07-05T07:52:53+00:00）</a:t>
-            </a:r>
-          </a:p>
-          <a:p>
-            <a:pPr algn="l">
+              <a:t>ev-s-20260705-0376-58［news］</a:t>
+            </a:r>
+            <a:r>
+              <a:rPr sz="1050" b="0">
+                <a:solidFill>
+                  <a:srgbClr val="2A63E8"/>
+                </a:solidFill>
+                <a:latin typeface="Helvetica Neue"/>
+                <a:hlinkClick r:id="rId11"/>
+                <a:ea typeface="PingFang SC"/>
+              </a:rPr>
+              <a:t>https://hn.algolia.com/api/v1/search_by_date?query=GB200+NVL72&amp;tags=story&amp;hitsPerPage=15&amp;numericFilters=created_at_i%3E%3D1709251200%2Ccreated_at_i%3C%3D1735689599</a:t>
+            </a:r>
+            <a:r>
+              <a:rPr sz="1050" b="0">
+                <a:solidFill>
+                  <a:srgbClr val="5B6B81"/>
+                </a:solidFill>
+                <a:latin typeface="Helvetica Neue"/>
+                <a:ea typeface="PingFang SC"/>
+              </a:rPr>
+              <a:t>（2026-07-05T07:52:53+00:00）</a:t>
+            </a:r>
+          </a:p>
+          <a:p>
+            <a:pPr>
               <a:lnSpc>
                 <a:spcPct val="110000"/>
               </a:lnSpc>
@@ -5178,11 +6395,32 @@
                 <a:latin typeface="Helvetica Neue"/>
                 <a:ea typeface="PingFang SC"/>
               </a:rPr>
-              <a:t>ev-s-20260705-0376-59［news］https://hn.algolia.com/api/v1/search_by_date?query=Llama+3&amp;tags=story&amp;hitsPerPage=15&amp;numericFilters=created_at_i%3E%3D1711929600%2Ccreated_at_i%3C%3D1722470399（2026-07-05T07:52:53+00:00）</a:t>
-            </a:r>
-          </a:p>
-          <a:p>
-            <a:pPr algn="l">
+              <a:t>ev-s-20260705-0376-59［news］</a:t>
+            </a:r>
+            <a:r>
+              <a:rPr sz="1050" b="0">
+                <a:solidFill>
+                  <a:srgbClr val="2A63E8"/>
+                </a:solidFill>
+                <a:latin typeface="Helvetica Neue"/>
+                <a:hlinkClick r:id="rId12"/>
+                <a:ea typeface="PingFang SC"/>
+              </a:rPr>
+              <a:t>https://hn.algolia.com/api/v1/search_by_date?query=Llama+3&amp;tags=story&amp;hitsPerPage=15&amp;numericFilters=created_at_i%3E%3D1711929600%2Ccreated_at_i%3C%3D1722470399</a:t>
+            </a:r>
+            <a:r>
+              <a:rPr sz="1050" b="0">
+                <a:solidFill>
+                  <a:srgbClr val="5B6B81"/>
+                </a:solidFill>
+                <a:latin typeface="Helvetica Neue"/>
+                <a:ea typeface="PingFang SC"/>
+              </a:rPr>
+              <a:t>（2026-07-05T07:52:53+00:00）</a:t>
+            </a:r>
+          </a:p>
+          <a:p>
+            <a:pPr>
               <a:lnSpc>
                 <a:spcPct val="110000"/>
               </a:lnSpc>
@@ -5198,7 +6436,28 @@
                 <a:latin typeface="Helvetica Neue"/>
                 <a:ea typeface="PingFang SC"/>
               </a:rPr>
-              <a:t>ev-s-20260705-0376-60［news］https://hn.algolia.com/api/v1/search_by_date?query=GPT-4&amp;tags=story&amp;hitsPerPage=15&amp;numericFilters=created_at_i%3E%3D1677628800%2Ccreated_at_i%3C%3D1681603199（2026-07-05T07:52:53+00:00）</a:t>
+              <a:t>ev-s-20260705-0376-60［news］</a:t>
+            </a:r>
+            <a:r>
+              <a:rPr sz="1050" b="0">
+                <a:solidFill>
+                  <a:srgbClr val="2A63E8"/>
+                </a:solidFill>
+                <a:latin typeface="Helvetica Neue"/>
+                <a:hlinkClick r:id="rId13"/>
+                <a:ea typeface="PingFang SC"/>
+              </a:rPr>
+              <a:t>https://hn.algolia.com/api/v1/search_by_date?query=GPT-4&amp;tags=story&amp;hitsPerPage=15&amp;numericFilters=created_at_i%3E%3D1677628800%2Ccreated_at_i%3C%3D1681603199</a:t>
+            </a:r>
+            <a:r>
+              <a:rPr sz="1050" b="0">
+                <a:solidFill>
+                  <a:srgbClr val="5B6B81"/>
+                </a:solidFill>
+                <a:latin typeface="Helvetica Neue"/>
+                <a:ea typeface="PingFang SC"/>
+              </a:rPr>
+              <a:t>（2026-07-05T07:52:53+00:00）</a:t>
             </a:r>
           </a:p>
         </p:txBody>
@@ -5359,7 +6618,7 @@
           </a:bodyPr>
           <a:lstStyle/>
           <a:p>
-            <a:pPr algn="l">
+            <a:pPr>
               <a:lnSpc>
                 <a:spcPct val="110000"/>
               </a:lnSpc>
@@ -5375,11 +6634,32 @@
                 <a:latin typeface="Helvetica Neue"/>
                 <a:ea typeface="PingFang SC"/>
               </a:rPr>
-              <a:t>ev-s-20260705-0376-61［news］https://hn.algolia.com/api/v1/search_by_date?query=Nvidia+Q4+earnings&amp;tags=story&amp;hitsPerPage=10&amp;numericFilters=created_at_i%3E%3D1740009600%2Ccreated_at_i%3C%3D1741219199（2026-07-05T07:52:53+00:00）</a:t>
-            </a:r>
-          </a:p>
-          <a:p>
-            <a:pPr algn="l">
+              <a:t>ev-s-20260705-0376-61［news］</a:t>
+            </a:r>
+            <a:r>
+              <a:rPr sz="1050" b="0">
+                <a:solidFill>
+                  <a:srgbClr val="2A63E8"/>
+                </a:solidFill>
+                <a:latin typeface="Helvetica Neue"/>
+                <a:hlinkClick r:id="rId2"/>
+                <a:ea typeface="PingFang SC"/>
+              </a:rPr>
+              <a:t>https://hn.algolia.com/api/v1/search_by_date?query=Nvidia+Q4+earnings&amp;tags=story&amp;hitsPerPage=10&amp;numericFilters=created_at_i%3E%3D1740009600%2Ccreated_at_i%3C%3D1741219199</a:t>
+            </a:r>
+            <a:r>
+              <a:rPr sz="1050" b="0">
+                <a:solidFill>
+                  <a:srgbClr val="5B6B81"/>
+                </a:solidFill>
+                <a:latin typeface="Helvetica Neue"/>
+                <a:ea typeface="PingFang SC"/>
+              </a:rPr>
+              <a:t>（2026-07-05T07:52:53+00:00）</a:t>
+            </a:r>
+          </a:p>
+          <a:p>
+            <a:pPr>
               <a:lnSpc>
                 <a:spcPct val="110000"/>
               </a:lnSpc>
@@ -5395,11 +6675,32 @@
                 <a:latin typeface="Helvetica Neue"/>
                 <a:ea typeface="PingFang SC"/>
               </a:rPr>
-              <a:t>ev-s-20260705-0376-62［news］https://hn.algolia.com/api/v1/search_by_date?query=Nvidia+market+cap&amp;tags=story&amp;hitsPerPage=15&amp;numericFilters=created_at_i%3E%3D1717200000%2Ccreated_at_i%3C%3D1719791999（2026-07-05T07:53:11+00:00）</a:t>
-            </a:r>
-          </a:p>
-          <a:p>
-            <a:pPr algn="l">
+              <a:t>ev-s-20260705-0376-62［news］</a:t>
+            </a:r>
+            <a:r>
+              <a:rPr sz="1050" b="0">
+                <a:solidFill>
+                  <a:srgbClr val="2A63E8"/>
+                </a:solidFill>
+                <a:latin typeface="Helvetica Neue"/>
+                <a:hlinkClick r:id="rId3"/>
+                <a:ea typeface="PingFang SC"/>
+              </a:rPr>
+              <a:t>https://hn.algolia.com/api/v1/search_by_date?query=Nvidia+market+cap&amp;tags=story&amp;hitsPerPage=15&amp;numericFilters=created_at_i%3E%3D1717200000%2Ccreated_at_i%3C%3D1719791999</a:t>
+            </a:r>
+            <a:r>
+              <a:rPr sz="1050" b="0">
+                <a:solidFill>
+                  <a:srgbClr val="5B6B81"/>
+                </a:solidFill>
+                <a:latin typeface="Helvetica Neue"/>
+                <a:ea typeface="PingFang SC"/>
+              </a:rPr>
+              <a:t>（2026-07-05T07:53:11+00:00）</a:t>
+            </a:r>
+          </a:p>
+          <a:p>
+            <a:pPr>
               <a:lnSpc>
                 <a:spcPct val="110000"/>
               </a:lnSpc>
@@ -5415,11 +6716,32 @@
                 <a:latin typeface="Helvetica Neue"/>
                 <a:ea typeface="PingFang SC"/>
               </a:rPr>
-              <a:t>ev-s-20260705-0376-63［news］https://hn.algolia.com/api/v1/search_by_date?query=Facebook+Meta&amp;tags=story&amp;hitsPerPage=10&amp;numericFilters=created_at_i%3E%3D1635120000%2Ccreated_at_i%3C%3D1636156799（2026-07-05T07:53:11+00:00）</a:t>
-            </a:r>
-          </a:p>
-          <a:p>
-            <a:pPr algn="l">
+              <a:t>ev-s-20260705-0376-63［news］</a:t>
+            </a:r>
+            <a:r>
+              <a:rPr sz="1050" b="0">
+                <a:solidFill>
+                  <a:srgbClr val="2A63E8"/>
+                </a:solidFill>
+                <a:latin typeface="Helvetica Neue"/>
+                <a:hlinkClick r:id="rId4"/>
+                <a:ea typeface="PingFang SC"/>
+              </a:rPr>
+              <a:t>https://hn.algolia.com/api/v1/search_by_date?query=Facebook+Meta&amp;tags=story&amp;hitsPerPage=10&amp;numericFilters=created_at_i%3E%3D1635120000%2Ccreated_at_i%3C%3D1636156799</a:t>
+            </a:r>
+            <a:r>
+              <a:rPr sz="1050" b="0">
+                <a:solidFill>
+                  <a:srgbClr val="5B6B81"/>
+                </a:solidFill>
+                <a:latin typeface="Helvetica Neue"/>
+                <a:ea typeface="PingFang SC"/>
+              </a:rPr>
+              <a:t>（2026-07-05T07:53:11+00:00）</a:t>
+            </a:r>
+          </a:p>
+          <a:p>
+            <a:pPr>
               <a:lnSpc>
                 <a:spcPct val="110000"/>
               </a:lnSpc>
@@ -5435,11 +6757,32 @@
                 <a:latin typeface="Helvetica Neue"/>
                 <a:ea typeface="PingFang SC"/>
               </a:rPr>
-              <a:t>ev-s-20260705-0376-64［news］https://hn.algolia.com/api/v1/search_by_date?query=Nvidia+DeepSeek+stock&amp;tags=story&amp;hitsPerPage=15&amp;numericFilters=created_at_i%3E%3D1737763200%2Ccreated_at_i%3C%3D1738799999（2026-07-05T07:53:11+00:00）</a:t>
-            </a:r>
-          </a:p>
-          <a:p>
-            <a:pPr algn="l">
+              <a:t>ev-s-20260705-0376-64［news］</a:t>
+            </a:r>
+            <a:r>
+              <a:rPr sz="1050" b="0">
+                <a:solidFill>
+                  <a:srgbClr val="2A63E8"/>
+                </a:solidFill>
+                <a:latin typeface="Helvetica Neue"/>
+                <a:hlinkClick r:id="rId5"/>
+                <a:ea typeface="PingFang SC"/>
+              </a:rPr>
+              <a:t>https://hn.algolia.com/api/v1/search_by_date?query=Nvidia+DeepSeek+stock&amp;tags=story&amp;hitsPerPage=15&amp;numericFilters=created_at_i%3E%3D1737763200%2Ccreated_at_i%3C%3D1738799999</a:t>
+            </a:r>
+            <a:r>
+              <a:rPr sz="1050" b="0">
+                <a:solidFill>
+                  <a:srgbClr val="5B6B81"/>
+                </a:solidFill>
+                <a:latin typeface="Helvetica Neue"/>
+                <a:ea typeface="PingFang SC"/>
+              </a:rPr>
+              <a:t>（2026-07-05T07:53:11+00:00）</a:t>
+            </a:r>
+          </a:p>
+          <a:p>
+            <a:pPr>
               <a:lnSpc>
                 <a:spcPct val="110000"/>
               </a:lnSpc>
@@ -5455,11 +6798,32 @@
                 <a:latin typeface="Helvetica Neue"/>
                 <a:ea typeface="PingFang SC"/>
               </a:rPr>
-              <a:t>ev-s-20260705-0376-65［news］https://hn.algolia.com/api/v1/search_by_date?query=OpenAI+o1&amp;tags=story&amp;hitsPerPage=15&amp;numericFilters=created_at_i%3E%3D1725148800%2Ccreated_at_i%3C%3D1735689599（2026-07-05T07:53:11+00:00）</a:t>
-            </a:r>
-          </a:p>
-          <a:p>
-            <a:pPr algn="l">
+              <a:t>ev-s-20260705-0376-65［news］</a:t>
+            </a:r>
+            <a:r>
+              <a:rPr sz="1050" b="0">
+                <a:solidFill>
+                  <a:srgbClr val="2A63E8"/>
+                </a:solidFill>
+                <a:latin typeface="Helvetica Neue"/>
+                <a:hlinkClick r:id="rId6"/>
+                <a:ea typeface="PingFang SC"/>
+              </a:rPr>
+              <a:t>https://hn.algolia.com/api/v1/search_by_date?query=OpenAI+o1&amp;tags=story&amp;hitsPerPage=15&amp;numericFilters=created_at_i%3E%3D1725148800%2Ccreated_at_i%3C%3D1735689599</a:t>
+            </a:r>
+            <a:r>
+              <a:rPr sz="1050" b="0">
+                <a:solidFill>
+                  <a:srgbClr val="5B6B81"/>
+                </a:solidFill>
+                <a:latin typeface="Helvetica Neue"/>
+                <a:ea typeface="PingFang SC"/>
+              </a:rPr>
+              <a:t>（2026-07-05T07:53:11+00:00）</a:t>
+            </a:r>
+          </a:p>
+          <a:p>
+            <a:pPr>
               <a:lnSpc>
                 <a:spcPct val="110000"/>
               </a:lnSpc>
@@ -5475,11 +6839,32 @@
                 <a:latin typeface="Helvetica Neue"/>
                 <a:ea typeface="PingFang SC"/>
               </a:rPr>
-              <a:t>ev-s-20260705-0376-66［news］https://hn.algolia.com/api/v1/search_by_date?query=Nvidia+Spectrum&amp;tags=story&amp;hitsPerPage=10&amp;numericFilters=created_at_i%3E%3D1714521600%2Ccreated_at_i%3C%3D1751327999（2026-07-05T07:54:22+00:00）</a:t>
-            </a:r>
-          </a:p>
-          <a:p>
-            <a:pPr algn="l">
+              <a:t>ev-s-20260705-0376-66［news］</a:t>
+            </a:r>
+            <a:r>
+              <a:rPr sz="1050" b="0">
+                <a:solidFill>
+                  <a:srgbClr val="2A63E8"/>
+                </a:solidFill>
+                <a:latin typeface="Helvetica Neue"/>
+                <a:hlinkClick r:id="rId7"/>
+                <a:ea typeface="PingFang SC"/>
+              </a:rPr>
+              <a:t>https://hn.algolia.com/api/v1/search_by_date?query=Nvidia+Spectrum&amp;tags=story&amp;hitsPerPage=10&amp;numericFilters=created_at_i%3E%3D1714521600%2Ccreated_at_i%3C%3D1751327999</a:t>
+            </a:r>
+            <a:r>
+              <a:rPr sz="1050" b="0">
+                <a:solidFill>
+                  <a:srgbClr val="5B6B81"/>
+                </a:solidFill>
+                <a:latin typeface="Helvetica Neue"/>
+                <a:ea typeface="PingFang SC"/>
+              </a:rPr>
+              <a:t>（2026-07-05T07:54:22+00:00）</a:t>
+            </a:r>
+          </a:p>
+          <a:p>
+            <a:pPr>
               <a:lnSpc>
                 <a:spcPct val="110000"/>
               </a:lnSpc>
@@ -5495,11 +6880,32 @@
                 <a:latin typeface="Helvetica Neue"/>
                 <a:ea typeface="PingFang SC"/>
               </a:rPr>
-              <a:t>ev-s-20260705-0376-67［news］https://hn.algolia.com/api/v1/search_by_date?query=Nvidia+Rubin&amp;tags=story&amp;hitsPerPage=15&amp;numericFilters=created_at_i%3E%3D1740787200%2Ccreated_at_i%3C%3D1751327999（2026-07-05T07:54:22+00:00）</a:t>
-            </a:r>
-          </a:p>
-          <a:p>
-            <a:pPr algn="l">
+              <a:t>ev-s-20260705-0376-67［news］</a:t>
+            </a:r>
+            <a:r>
+              <a:rPr sz="1050" b="0">
+                <a:solidFill>
+                  <a:srgbClr val="2A63E8"/>
+                </a:solidFill>
+                <a:latin typeface="Helvetica Neue"/>
+                <a:hlinkClick r:id="rId8"/>
+                <a:ea typeface="PingFang SC"/>
+              </a:rPr>
+              <a:t>https://hn.algolia.com/api/v1/search_by_date?query=Nvidia+Rubin&amp;tags=story&amp;hitsPerPage=15&amp;numericFilters=created_at_i%3E%3D1740787200%2Ccreated_at_i%3C%3D1751327999</a:t>
+            </a:r>
+            <a:r>
+              <a:rPr sz="1050" b="0">
+                <a:solidFill>
+                  <a:srgbClr val="5B6B81"/>
+                </a:solidFill>
+                <a:latin typeface="Helvetica Neue"/>
+                <a:ea typeface="PingFang SC"/>
+              </a:rPr>
+              <a:t>（2026-07-05T07:54:22+00:00）</a:t>
+            </a:r>
+          </a:p>
+          <a:p>
+            <a:pPr>
               <a:lnSpc>
                 <a:spcPct val="110000"/>
               </a:lnSpc>
@@ -5515,11 +6921,32 @@
                 <a:latin typeface="Helvetica Neue"/>
                 <a:ea typeface="PingFang SC"/>
               </a:rPr>
-              <a:t>ev-s-20260705-0376-68［news］https://hn.algolia.com/api/v1/search_by_date?query=GPT-4o&amp;tags=story&amp;hitsPerPage=15&amp;numericFilters=created_at_i%3E%3D1714521600%2Ccreated_at_i%3C%3D1718495999（2026-07-05T07:54:22+00:00）</a:t>
-            </a:r>
-          </a:p>
-          <a:p>
-            <a:pPr algn="l">
+              <a:t>ev-s-20260705-0376-68［news］</a:t>
+            </a:r>
+            <a:r>
+              <a:rPr sz="1050" b="0">
+                <a:solidFill>
+                  <a:srgbClr val="2A63E8"/>
+                </a:solidFill>
+                <a:latin typeface="Helvetica Neue"/>
+                <a:hlinkClick r:id="rId9"/>
+                <a:ea typeface="PingFang SC"/>
+              </a:rPr>
+              <a:t>https://hn.algolia.com/api/v1/search_by_date?query=GPT-4o&amp;tags=story&amp;hitsPerPage=15&amp;numericFilters=created_at_i%3E%3D1714521600%2Ccreated_at_i%3C%3D1718495999</a:t>
+            </a:r>
+            <a:r>
+              <a:rPr sz="1050" b="0">
+                <a:solidFill>
+                  <a:srgbClr val="5B6B81"/>
+                </a:solidFill>
+                <a:latin typeface="Helvetica Neue"/>
+                <a:ea typeface="PingFang SC"/>
+              </a:rPr>
+              <a:t>（2026-07-05T07:54:22+00:00）</a:t>
+            </a:r>
+          </a:p>
+          <a:p>
+            <a:pPr>
               <a:lnSpc>
                 <a:spcPct val="110000"/>
               </a:lnSpc>
@@ -5535,11 +6962,32 @@
                 <a:latin typeface="Helvetica Neue"/>
                 <a:ea typeface="PingFang SC"/>
               </a:rPr>
-              <a:t>ev-s-20260705-0376-69［news］https://hn.algolia.com/api/v1/search_by_date?query=Llama+4&amp;tags=story&amp;hitsPerPage=15&amp;numericFilters=created_at_i%3E%3D1743465600%2Ccreated_at_i%3C%3D1751327999（2026-07-05T07:54:27+00:00）</a:t>
-            </a:r>
-          </a:p>
-          <a:p>
-            <a:pPr algn="l">
+              <a:t>ev-s-20260705-0376-69［news］</a:t>
+            </a:r>
+            <a:r>
+              <a:rPr sz="1050" b="0">
+                <a:solidFill>
+                  <a:srgbClr val="2A63E8"/>
+                </a:solidFill>
+                <a:latin typeface="Helvetica Neue"/>
+                <a:hlinkClick r:id="rId10"/>
+                <a:ea typeface="PingFang SC"/>
+              </a:rPr>
+              <a:t>https://hn.algolia.com/api/v1/search_by_date?query=Llama+4&amp;tags=story&amp;hitsPerPage=15&amp;numericFilters=created_at_i%3E%3D1743465600%2Ccreated_at_i%3C%3D1751327999</a:t>
+            </a:r>
+            <a:r>
+              <a:rPr sz="1050" b="0">
+                <a:solidFill>
+                  <a:srgbClr val="5B6B81"/>
+                </a:solidFill>
+                <a:latin typeface="Helvetica Neue"/>
+                <a:ea typeface="PingFang SC"/>
+              </a:rPr>
+              <a:t>（2026-07-05T07:54:27+00:00）</a:t>
+            </a:r>
+          </a:p>
+          <a:p>
+            <a:pPr>
               <a:lnSpc>
                 <a:spcPct val="110000"/>
               </a:lnSpc>
@@ -5555,11 +7003,32 @@
                 <a:latin typeface="Helvetica Neue"/>
                 <a:ea typeface="PingFang SC"/>
               </a:rPr>
-              <a:t>ev-s-20260705-0376-70［news］https://hn.algolia.com/api/v1/search_by_date?query=OpenAI+o3&amp;tags=story&amp;hitsPerPage=10&amp;numericFilters=created_at_i%3E%3D1734220800%2Ccreated_at_i%3C%3D1736985599（2026-07-05T07:54:44+00:00）</a:t>
-            </a:r>
-          </a:p>
-          <a:p>
-            <a:pPr algn="l">
+              <a:t>ev-s-20260705-0376-70［news］</a:t>
+            </a:r>
+            <a:r>
+              <a:rPr sz="1050" b="0">
+                <a:solidFill>
+                  <a:srgbClr val="2A63E8"/>
+                </a:solidFill>
+                <a:latin typeface="Helvetica Neue"/>
+                <a:hlinkClick r:id="rId11"/>
+                <a:ea typeface="PingFang SC"/>
+              </a:rPr>
+              <a:t>https://hn.algolia.com/api/v1/search_by_date?query=OpenAI+o3&amp;tags=story&amp;hitsPerPage=10&amp;numericFilters=created_at_i%3E%3D1734220800%2Ccreated_at_i%3C%3D1736985599</a:t>
+            </a:r>
+            <a:r>
+              <a:rPr sz="1050" b="0">
+                <a:solidFill>
+                  <a:srgbClr val="5B6B81"/>
+                </a:solidFill>
+                <a:latin typeface="Helvetica Neue"/>
+                <a:ea typeface="PingFang SC"/>
+              </a:rPr>
+              <a:t>（2026-07-05T07:54:44+00:00）</a:t>
+            </a:r>
+          </a:p>
+          <a:p>
+            <a:pPr>
               <a:lnSpc>
                 <a:spcPct val="110000"/>
               </a:lnSpc>
@@ -5575,11 +7044,32 @@
                 <a:latin typeface="Helvetica Neue"/>
                 <a:ea typeface="PingFang SC"/>
               </a:rPr>
-              <a:t>ev-s-20260705-0376-71［news］https://hn.algolia.com/api/v1/search_by_date?query=Nvidia+GB300&amp;tags=story&amp;hitsPerPage=10&amp;numericFilters=created_at_i%3E%3D1733011200%2Ccreated_at_i%3C%3D1751327999（2026-07-05T07:54:44+00:00）</a:t>
-            </a:r>
-          </a:p>
-          <a:p>
-            <a:pPr algn="l">
+              <a:t>ev-s-20260705-0376-71［news］</a:t>
+            </a:r>
+            <a:r>
+              <a:rPr sz="1050" b="0">
+                <a:solidFill>
+                  <a:srgbClr val="2A63E8"/>
+                </a:solidFill>
+                <a:latin typeface="Helvetica Neue"/>
+                <a:hlinkClick r:id="rId12"/>
+                <a:ea typeface="PingFang SC"/>
+              </a:rPr>
+              <a:t>https://hn.algolia.com/api/v1/search_by_date?query=Nvidia+GB300&amp;tags=story&amp;hitsPerPage=10&amp;numericFilters=created_at_i%3E%3D1733011200%2Ccreated_at_i%3C%3D1751327999</a:t>
+            </a:r>
+            <a:r>
+              <a:rPr sz="1050" b="0">
+                <a:solidFill>
+                  <a:srgbClr val="5B6B81"/>
+                </a:solidFill>
+                <a:latin typeface="Helvetica Neue"/>
+                <a:ea typeface="PingFang SC"/>
+              </a:rPr>
+              <a:t>（2026-07-05T07:54:44+00:00）</a:t>
+            </a:r>
+          </a:p>
+          <a:p>
+            <a:pPr>
               <a:lnSpc>
                 <a:spcPct val="110000"/>
               </a:lnSpc>
@@ -5595,7 +7085,28 @@
                 <a:latin typeface="Helvetica Neue"/>
                 <a:ea typeface="PingFang SC"/>
               </a:rPr>
-              <a:t>ev-s-20260705-0376-72［news］https://hn.algolia.com/api/v1/search_by_date?query=Claude+3.5&amp;tags=story&amp;hitsPerPage=10&amp;numericFilters=created_at_i%3E%3D1717200000%2Ccreated_at_i%3C%3D1722470399（2026-07-05T07:54:44+00:00）</a:t>
+              <a:t>ev-s-20260705-0376-72［news］</a:t>
+            </a:r>
+            <a:r>
+              <a:rPr sz="1050" b="0">
+                <a:solidFill>
+                  <a:srgbClr val="2A63E8"/>
+                </a:solidFill>
+                <a:latin typeface="Helvetica Neue"/>
+                <a:hlinkClick r:id="rId13"/>
+                <a:ea typeface="PingFang SC"/>
+              </a:rPr>
+              <a:t>https://hn.algolia.com/api/v1/search_by_date?query=Claude+3.5&amp;tags=story&amp;hitsPerPage=10&amp;numericFilters=created_at_i%3E%3D1717200000%2Ccreated_at_i%3C%3D1722470399</a:t>
+            </a:r>
+            <a:r>
+              <a:rPr sz="1050" b="0">
+                <a:solidFill>
+                  <a:srgbClr val="5B6B81"/>
+                </a:solidFill>
+                <a:latin typeface="Helvetica Neue"/>
+                <a:ea typeface="PingFang SC"/>
+              </a:rPr>
+              <a:t>（2026-07-05T07:54:44+00:00）</a:t>
             </a:r>
           </a:p>
         </p:txBody>
